--- a/jazzx-design-studio/JazzX-Design-Studio-Executive-Summary.pptx
+++ b/jazzx-design-studio/JazzX-Design-Studio-Executive-Summary.pptx
@@ -7104,7 +7104,7 @@
                 <a:ea typeface="Calibri" pitchFamily="34" charset="-122"/>
                 <a:cs typeface="Calibri" pitchFamily="34" charset="-120"/>
               </a:rPr>
-              <a:t>18 one-pagers, each with purpose, RACI, decisions, framework, templates, cadence, definition of done and risks.</a:t>
+              <a:t>22 one-pagers, each with purpose, RACI, decisions, framework, templates, cadence, definition of done and risks.</a:t>
             </a:r>
             <a:endParaRPr lang="en-US" sz="1400" dirty="0"/>
           </a:p>
@@ -7119,11 +7119,11 @@
         <p:spPr>
           <a:xfrm>
             <a:off x="502920" y="1783080"/>
-            <a:ext cx="3535680" cy="950976"/>
+            <a:ext cx="3535680" cy="877824"/>
           </a:xfrm>
           <a:prstGeom prst="roundRect">
             <a:avLst>
-              <a:gd name="adj" fmla="val 7692"/>
+              <a:gd name="adj" fmla="val 8333"/>
             </a:avLst>
           </a:prstGeom>
           <a:solidFill>
@@ -7191,24 +7191,24 @@
         </p:nvSpPr>
         <p:spPr>
           <a:xfrm>
-            <a:off x="740664" y="2350008"/>
-            <a:ext cx="3060192" cy="256032"/>
-          </a:xfrm>
-          <a:prstGeom prst="rect">
-            <a:avLst/>
-          </a:prstGeom>
-          <a:noFill/>
-          <a:ln/>
-        </p:spPr>
-        <p:txBody>
-          <a:bodyPr wrap="square" lIns="0" tIns="0" rIns="0" bIns="0" rtlCol="0" anchor="t"/>
-          <a:lstStyle/>
-          <a:p>
-            <a:pPr algn="l" indent="0" marL="0">
-              <a:buNone/>
-            </a:pPr>
-            <a:r>
-              <a:rPr lang="en-US" sz="1150" dirty="0">
+            <a:off x="740664" y="2313432"/>
+            <a:ext cx="3060192" cy="237744"/>
+          </a:xfrm>
+          <a:prstGeom prst="rect">
+            <a:avLst/>
+          </a:prstGeom>
+          <a:noFill/>
+          <a:ln/>
+        </p:spPr>
+        <p:txBody>
+          <a:bodyPr wrap="square" lIns="0" tIns="0" rIns="0" bIns="0" rtlCol="0" anchor="t"/>
+          <a:lstStyle/>
+          <a:p>
+            <a:pPr algn="l" indent="0" marL="0">
+              <a:buNone/>
+            </a:pPr>
+            <a:r>
+              <a:rPr lang="en-US" sz="1100" dirty="0">
                 <a:solidFill>
                   <a:srgbClr val="0E3A4F"/>
                 </a:solidFill>
@@ -7218,7 +7218,7 @@
               </a:rPr>
               <a:t>01  Master 90-Day Plan</a:t>
             </a:r>
-            <a:endParaRPr lang="en-US" sz="1150" dirty="0"/>
+            <a:endParaRPr lang="en-US" sz="1100" dirty="0"/>
           </a:p>
         </p:txBody>
       </p:sp>
@@ -7230,12 +7230,12 @@
         </p:nvSpPr>
         <p:spPr>
           <a:xfrm>
-            <a:off x="502920" y="2990088"/>
-            <a:ext cx="3535680" cy="1536192"/>
+            <a:off x="502920" y="2898648"/>
+            <a:ext cx="3535680" cy="1389888"/>
           </a:xfrm>
           <a:prstGeom prst="roundRect">
             <a:avLst>
-              <a:gd name="adj" fmla="val 4762"/>
+              <a:gd name="adj" fmla="val 5263"/>
             </a:avLst>
           </a:prstGeom>
           <a:solidFill>
@@ -7264,7 +7264,7 @@
         </p:nvSpPr>
         <p:spPr>
           <a:xfrm>
-            <a:off x="740664" y="3136392"/>
+            <a:off x="740664" y="3044952"/>
             <a:ext cx="3060192" cy="310896"/>
           </a:xfrm>
           <a:prstGeom prst="rect">
@@ -7303,24 +7303,24 @@
         </p:nvSpPr>
         <p:spPr>
           <a:xfrm>
-            <a:off x="740664" y="3557016"/>
-            <a:ext cx="3060192" cy="256032"/>
-          </a:xfrm>
-          <a:prstGeom prst="rect">
-            <a:avLst/>
-          </a:prstGeom>
-          <a:noFill/>
-          <a:ln/>
-        </p:spPr>
-        <p:txBody>
-          <a:bodyPr wrap="square" lIns="0" tIns="0" rIns="0" bIns="0" rtlCol="0" anchor="t"/>
-          <a:lstStyle/>
-          <a:p>
-            <a:pPr algn="l" indent="0" marL="0">
-              <a:buNone/>
-            </a:pPr>
-            <a:r>
-              <a:rPr lang="en-US" sz="1150" dirty="0">
+            <a:off x="740664" y="3429000"/>
+            <a:ext cx="3060192" cy="237744"/>
+          </a:xfrm>
+          <a:prstGeom prst="rect">
+            <a:avLst/>
+          </a:prstGeom>
+          <a:noFill/>
+          <a:ln/>
+        </p:spPr>
+        <p:txBody>
+          <a:bodyPr wrap="square" lIns="0" tIns="0" rIns="0" bIns="0" rtlCol="0" anchor="t"/>
+          <a:lstStyle/>
+          <a:p>
+            <a:pPr algn="l" indent="0" marL="0">
+              <a:buNone/>
+            </a:pPr>
+            <a:r>
+              <a:rPr lang="en-US" sz="1100" dirty="0">
                 <a:solidFill>
                   <a:srgbClr val="0E3A4F"/>
                 </a:solidFill>
@@ -7330,7 +7330,7 @@
               </a:rPr>
               <a:t>02  Governance Structure</a:t>
             </a:r>
-            <a:endParaRPr lang="en-US" sz="1150" dirty="0"/>
+            <a:endParaRPr lang="en-US" sz="1100" dirty="0"/>
           </a:p>
         </p:txBody>
       </p:sp>
@@ -7342,24 +7342,24 @@
         </p:nvSpPr>
         <p:spPr>
           <a:xfrm>
-            <a:off x="740664" y="3831336"/>
-            <a:ext cx="3060192" cy="256032"/>
-          </a:xfrm>
-          <a:prstGeom prst="rect">
-            <a:avLst/>
-          </a:prstGeom>
-          <a:noFill/>
-          <a:ln/>
-        </p:spPr>
-        <p:txBody>
-          <a:bodyPr wrap="square" lIns="0" tIns="0" rIns="0" bIns="0" rtlCol="0" anchor="t"/>
-          <a:lstStyle/>
-          <a:p>
-            <a:pPr algn="l" indent="0" marL="0">
-              <a:buNone/>
-            </a:pPr>
-            <a:r>
-              <a:rPr lang="en-US" sz="1150" dirty="0">
+            <a:off x="740664" y="3685032"/>
+            <a:ext cx="3060192" cy="237744"/>
+          </a:xfrm>
+          <a:prstGeom prst="rect">
+            <a:avLst/>
+          </a:prstGeom>
+          <a:noFill/>
+          <a:ln/>
+        </p:spPr>
+        <p:txBody>
+          <a:bodyPr wrap="square" lIns="0" tIns="0" rIns="0" bIns="0" rtlCol="0" anchor="t"/>
+          <a:lstStyle/>
+          <a:p>
+            <a:pPr algn="l" indent="0" marL="0">
+              <a:buNone/>
+            </a:pPr>
+            <a:r>
+              <a:rPr lang="en-US" sz="1100" dirty="0">
                 <a:solidFill>
                   <a:srgbClr val="0E3A4F"/>
                 </a:solidFill>
@@ -7369,7 +7369,7 @@
               </a:rPr>
               <a:t>03  Borrower &amp; Internal Communications</a:t>
             </a:r>
-            <a:endParaRPr lang="en-US" sz="1150" dirty="0"/>
+            <a:endParaRPr lang="en-US" sz="1100" dirty="0"/>
           </a:p>
         </p:txBody>
       </p:sp>
@@ -7381,24 +7381,24 @@
         </p:nvSpPr>
         <p:spPr>
           <a:xfrm>
-            <a:off x="740664" y="4105656"/>
-            <a:ext cx="3060192" cy="256032"/>
-          </a:xfrm>
-          <a:prstGeom prst="rect">
-            <a:avLst/>
-          </a:prstGeom>
-          <a:noFill/>
-          <a:ln/>
-        </p:spPr>
-        <p:txBody>
-          <a:bodyPr wrap="square" lIns="0" tIns="0" rIns="0" bIns="0" rtlCol="0" anchor="t"/>
-          <a:lstStyle/>
-          <a:p>
-            <a:pPr algn="l" indent="0" marL="0">
-              <a:buNone/>
-            </a:pPr>
-            <a:r>
-              <a:rPr lang="en-US" sz="1150" dirty="0">
+            <a:off x="740664" y="3941064"/>
+            <a:ext cx="3060192" cy="237744"/>
+          </a:xfrm>
+          <a:prstGeom prst="rect">
+            <a:avLst/>
+          </a:prstGeom>
+          <a:noFill/>
+          <a:ln/>
+        </p:spPr>
+        <p:txBody>
+          <a:bodyPr wrap="square" lIns="0" tIns="0" rIns="0" bIns="0" rtlCol="0" anchor="t"/>
+          <a:lstStyle/>
+          <a:p>
+            <a:pPr algn="l" indent="0" marL="0">
+              <a:buNone/>
+            </a:pPr>
+            <a:r>
+              <a:rPr lang="en-US" sz="1100" dirty="0">
                 <a:solidFill>
                   <a:srgbClr val="0E3A4F"/>
                 </a:solidFill>
@@ -7408,7 +7408,7 @@
               </a:rPr>
               <a:t>04  Change Management</a:t>
             </a:r>
-            <a:endParaRPr lang="en-US" sz="1150" dirty="0"/>
+            <a:endParaRPr lang="en-US" sz="1100" dirty="0"/>
           </a:p>
         </p:txBody>
       </p:sp>
@@ -7421,11 +7421,11 @@
         <p:spPr>
           <a:xfrm>
             <a:off x="4312920" y="1783080"/>
-            <a:ext cx="3535680" cy="1536192"/>
+            <a:ext cx="3535680" cy="1389888"/>
           </a:xfrm>
           <a:prstGeom prst="roundRect">
             <a:avLst>
-              <a:gd name="adj" fmla="val 4762"/>
+              <a:gd name="adj" fmla="val 5263"/>
             </a:avLst>
           </a:prstGeom>
           <a:solidFill>
@@ -7493,24 +7493,24 @@
         </p:nvSpPr>
         <p:spPr>
           <a:xfrm>
-            <a:off x="4550664" y="2350008"/>
-            <a:ext cx="3060192" cy="256032"/>
-          </a:xfrm>
-          <a:prstGeom prst="rect">
-            <a:avLst/>
-          </a:prstGeom>
-          <a:noFill/>
-          <a:ln/>
-        </p:spPr>
-        <p:txBody>
-          <a:bodyPr wrap="square" lIns="0" tIns="0" rIns="0" bIns="0" rtlCol="0" anchor="t"/>
-          <a:lstStyle/>
-          <a:p>
-            <a:pPr algn="l" indent="0" marL="0">
-              <a:buNone/>
-            </a:pPr>
-            <a:r>
-              <a:rPr lang="en-US" sz="1150" dirty="0">
+            <a:off x="4550664" y="2313432"/>
+            <a:ext cx="3060192" cy="237744"/>
+          </a:xfrm>
+          <a:prstGeom prst="rect">
+            <a:avLst/>
+          </a:prstGeom>
+          <a:noFill/>
+          <a:ln/>
+        </p:spPr>
+        <p:txBody>
+          <a:bodyPr wrap="square" lIns="0" tIns="0" rIns="0" bIns="0" rtlCol="0" anchor="t"/>
+          <a:lstStyle/>
+          <a:p>
+            <a:pPr algn="l" indent="0" marL="0">
+              <a:buNone/>
+            </a:pPr>
+            <a:r>
+              <a:rPr lang="en-US" sz="1100" dirty="0">
                 <a:solidFill>
                   <a:srgbClr val="0E3A4F"/>
                 </a:solidFill>
@@ -7520,7 +7520,7 @@
               </a:rPr>
               <a:t>05  Define What Value Looks Like</a:t>
             </a:r>
-            <a:endParaRPr lang="en-US" sz="1150" dirty="0"/>
+            <a:endParaRPr lang="en-US" sz="1100" dirty="0"/>
           </a:p>
         </p:txBody>
       </p:sp>
@@ -7532,24 +7532,24 @@
         </p:nvSpPr>
         <p:spPr>
           <a:xfrm>
-            <a:off x="4550664" y="2624328"/>
-            <a:ext cx="3060192" cy="256032"/>
-          </a:xfrm>
-          <a:prstGeom prst="rect">
-            <a:avLst/>
-          </a:prstGeom>
-          <a:noFill/>
-          <a:ln/>
-        </p:spPr>
-        <p:txBody>
-          <a:bodyPr wrap="square" lIns="0" tIns="0" rIns="0" bIns="0" rtlCol="0" anchor="t"/>
-          <a:lstStyle/>
-          <a:p>
-            <a:pPr algn="l" indent="0" marL="0">
-              <a:buNone/>
-            </a:pPr>
-            <a:r>
-              <a:rPr lang="en-US" sz="1150" dirty="0">
+            <a:off x="4550664" y="2569464"/>
+            <a:ext cx="3060192" cy="237744"/>
+          </a:xfrm>
+          <a:prstGeom prst="rect">
+            <a:avLst/>
+          </a:prstGeom>
+          <a:noFill/>
+          <a:ln/>
+        </p:spPr>
+        <p:txBody>
+          <a:bodyPr wrap="square" lIns="0" tIns="0" rIns="0" bIns="0" rtlCol="0" anchor="t"/>
+          <a:lstStyle/>
+          <a:p>
+            <a:pPr algn="l" indent="0" marL="0">
+              <a:buNone/>
+            </a:pPr>
+            <a:r>
+              <a:rPr lang="en-US" sz="1100" dirty="0">
                 <a:solidFill>
                   <a:srgbClr val="0E3A4F"/>
                 </a:solidFill>
@@ -7559,7 +7559,7 @@
               </a:rPr>
               <a:t>06  Baseline, Targets &amp; Thresholds</a:t>
             </a:r>
-            <a:endParaRPr lang="en-US" sz="1150" dirty="0"/>
+            <a:endParaRPr lang="en-US" sz="1100" dirty="0"/>
           </a:p>
         </p:txBody>
       </p:sp>
@@ -7571,24 +7571,24 @@
         </p:nvSpPr>
         <p:spPr>
           <a:xfrm>
-            <a:off x="4550664" y="2898648"/>
-            <a:ext cx="3060192" cy="256032"/>
-          </a:xfrm>
-          <a:prstGeom prst="rect">
-            <a:avLst/>
-          </a:prstGeom>
-          <a:noFill/>
-          <a:ln/>
-        </p:spPr>
-        <p:txBody>
-          <a:bodyPr wrap="square" lIns="0" tIns="0" rIns="0" bIns="0" rtlCol="0" anchor="t"/>
-          <a:lstStyle/>
-          <a:p>
-            <a:pPr algn="l" indent="0" marL="0">
-              <a:buNone/>
-            </a:pPr>
-            <a:r>
-              <a:rPr lang="en-US" sz="1150" dirty="0">
+            <a:off x="4550664" y="2825496"/>
+            <a:ext cx="3060192" cy="237744"/>
+          </a:xfrm>
+          <a:prstGeom prst="rect">
+            <a:avLst/>
+          </a:prstGeom>
+          <a:noFill/>
+          <a:ln/>
+        </p:spPr>
+        <p:txBody>
+          <a:bodyPr wrap="square" lIns="0" tIns="0" rIns="0" bIns="0" rtlCol="0" anchor="t"/>
+          <a:lstStyle/>
+          <a:p>
+            <a:pPr algn="l" indent="0" marL="0">
+              <a:buNone/>
+            </a:pPr>
+            <a:r>
+              <a:rPr lang="en-US" sz="1100" dirty="0">
                 <a:solidFill>
                   <a:srgbClr val="0E3A4F"/>
                 </a:solidFill>
@@ -7598,7 +7598,7 @@
               </a:rPr>
               <a:t>07  Go / No-Go Decision Criteria</a:t>
             </a:r>
-            <a:endParaRPr lang="en-US" sz="1150" dirty="0"/>
+            <a:endParaRPr lang="en-US" sz="1100" dirty="0"/>
           </a:p>
         </p:txBody>
       </p:sp>
@@ -7610,12 +7610,12 @@
         </p:nvSpPr>
         <p:spPr>
           <a:xfrm>
-            <a:off x="4312920" y="3575304"/>
-            <a:ext cx="3535680" cy="2414016"/>
+            <a:off x="4312920" y="3410712"/>
+            <a:ext cx="3535680" cy="2157984"/>
           </a:xfrm>
           <a:prstGeom prst="roundRect">
             <a:avLst>
-              <a:gd name="adj" fmla="val 3030"/>
+              <a:gd name="adj" fmla="val 3390"/>
             </a:avLst>
           </a:prstGeom>
           <a:solidFill>
@@ -7644,7 +7644,7 @@
         </p:nvSpPr>
         <p:spPr>
           <a:xfrm>
-            <a:off x="4550664" y="3721608"/>
+            <a:off x="4550664" y="3557016"/>
             <a:ext cx="3060192" cy="310896"/>
           </a:xfrm>
           <a:prstGeom prst="rect">
@@ -7683,24 +7683,24 @@
         </p:nvSpPr>
         <p:spPr>
           <a:xfrm>
-            <a:off x="4550664" y="4142232"/>
-            <a:ext cx="3060192" cy="256032"/>
-          </a:xfrm>
-          <a:prstGeom prst="rect">
-            <a:avLst/>
-          </a:prstGeom>
-          <a:noFill/>
-          <a:ln/>
-        </p:spPr>
-        <p:txBody>
-          <a:bodyPr wrap="square" lIns="0" tIns="0" rIns="0" bIns="0" rtlCol="0" anchor="t"/>
-          <a:lstStyle/>
-          <a:p>
-            <a:pPr algn="l" indent="0" marL="0">
-              <a:buNone/>
-            </a:pPr>
-            <a:r>
-              <a:rPr lang="en-US" sz="1150" dirty="0">
+            <a:off x="4550664" y="3941064"/>
+            <a:ext cx="3060192" cy="237744"/>
+          </a:xfrm>
+          <a:prstGeom prst="rect">
+            <a:avLst/>
+          </a:prstGeom>
+          <a:noFill/>
+          <a:ln/>
+        </p:spPr>
+        <p:txBody>
+          <a:bodyPr wrap="square" lIns="0" tIns="0" rIns="0" bIns="0" rtlCol="0" anchor="t"/>
+          <a:lstStyle/>
+          <a:p>
+            <a:pPr algn="l" indent="0" marL="0">
+              <a:buNone/>
+            </a:pPr>
+            <a:r>
+              <a:rPr lang="en-US" sz="1100" dirty="0">
                 <a:solidFill>
                   <a:srgbClr val="0E3A4F"/>
                 </a:solidFill>
@@ -7710,7 +7710,7 @@
               </a:rPr>
               <a:t>08  Launch Design Studio</a:t>
             </a:r>
-            <a:endParaRPr lang="en-US" sz="1150" dirty="0"/>
+            <a:endParaRPr lang="en-US" sz="1100" dirty="0"/>
           </a:p>
         </p:txBody>
       </p:sp>
@@ -7722,24 +7722,24 @@
         </p:nvSpPr>
         <p:spPr>
           <a:xfrm>
-            <a:off x="4550664" y="4416552"/>
-            <a:ext cx="3060192" cy="256032"/>
-          </a:xfrm>
-          <a:prstGeom prst="rect">
-            <a:avLst/>
-          </a:prstGeom>
-          <a:noFill/>
-          <a:ln/>
-        </p:spPr>
-        <p:txBody>
-          <a:bodyPr wrap="square" lIns="0" tIns="0" rIns="0" bIns="0" rtlCol="0" anchor="t"/>
-          <a:lstStyle/>
-          <a:p>
-            <a:pPr algn="l" indent="0" marL="0">
-              <a:buNone/>
-            </a:pPr>
-            <a:r>
-              <a:rPr lang="en-US" sz="1150" dirty="0">
+            <a:off x="4550664" y="4197096"/>
+            <a:ext cx="3060192" cy="237744"/>
+          </a:xfrm>
+          <a:prstGeom prst="rect">
+            <a:avLst/>
+          </a:prstGeom>
+          <a:noFill/>
+          <a:ln/>
+        </p:spPr>
+        <p:txBody>
+          <a:bodyPr wrap="square" lIns="0" tIns="0" rIns="0" bIns="0" rtlCol="0" anchor="t"/>
+          <a:lstStyle/>
+          <a:p>
+            <a:pPr algn="l" indent="0" marL="0">
+              <a:buNone/>
+            </a:pPr>
+            <a:r>
+              <a:rPr lang="en-US" sz="1100" dirty="0">
                 <a:solidFill>
                   <a:srgbClr val="0E3A4F"/>
                 </a:solidFill>
@@ -7749,7 +7749,7 @@
               </a:rPr>
               <a:t>09  Small Cross-Functional Team</a:t>
             </a:r>
-            <a:endParaRPr lang="en-US" sz="1150" dirty="0"/>
+            <a:endParaRPr lang="en-US" sz="1100" dirty="0"/>
           </a:p>
         </p:txBody>
       </p:sp>
@@ -7761,24 +7761,24 @@
         </p:nvSpPr>
         <p:spPr>
           <a:xfrm>
-            <a:off x="4550664" y="4690872"/>
-            <a:ext cx="3060192" cy="256032"/>
-          </a:xfrm>
-          <a:prstGeom prst="rect">
-            <a:avLst/>
-          </a:prstGeom>
-          <a:noFill/>
-          <a:ln/>
-        </p:spPr>
-        <p:txBody>
-          <a:bodyPr wrap="square" lIns="0" tIns="0" rIns="0" bIns="0" rtlCol="0" anchor="t"/>
-          <a:lstStyle/>
-          <a:p>
-            <a:pPr algn="l" indent="0" marL="0">
-              <a:buNone/>
-            </a:pPr>
-            <a:r>
-              <a:rPr lang="en-US" sz="1150" dirty="0">
+            <a:off x="4550664" y="4453128"/>
+            <a:ext cx="3060192" cy="237744"/>
+          </a:xfrm>
+          <a:prstGeom prst="rect">
+            <a:avLst/>
+          </a:prstGeom>
+          <a:noFill/>
+          <a:ln/>
+        </p:spPr>
+        <p:txBody>
+          <a:bodyPr wrap="square" lIns="0" tIns="0" rIns="0" bIns="0" rtlCol="0" anchor="t"/>
+          <a:lstStyle/>
+          <a:p>
+            <a:pPr algn="l" indent="0" marL="0">
+              <a:buNone/>
+            </a:pPr>
+            <a:r>
+              <a:rPr lang="en-US" sz="1100" dirty="0">
                 <a:solidFill>
                   <a:srgbClr val="0E3A4F"/>
                 </a:solidFill>
@@ -7788,7 +7788,7 @@
               </a:rPr>
               <a:t>10  Loan Types &amp; Market Selection</a:t>
             </a:r>
-            <a:endParaRPr lang="en-US" sz="1150" dirty="0"/>
+            <a:endParaRPr lang="en-US" sz="1100" dirty="0"/>
           </a:p>
         </p:txBody>
       </p:sp>
@@ -7800,24 +7800,63 @@
         </p:nvSpPr>
         <p:spPr>
           <a:xfrm>
+            <a:off x="4550664" y="4709160"/>
+            <a:ext cx="3060192" cy="237744"/>
+          </a:xfrm>
+          <a:prstGeom prst="rect">
+            <a:avLst/>
+          </a:prstGeom>
+          <a:noFill/>
+          <a:ln/>
+        </p:spPr>
+        <p:txBody>
+          <a:bodyPr wrap="square" lIns="0" tIns="0" rIns="0" bIns="0" rtlCol="0" anchor="t"/>
+          <a:lstStyle/>
+          <a:p>
+            <a:pPr algn="l" indent="0" marL="0">
+              <a:buNone/>
+            </a:pPr>
+            <a:r>
+              <a:rPr lang="en-US" sz="1100" dirty="0">
+                <a:solidFill>
+                  <a:srgbClr val="0E3A4F"/>
+                </a:solidFill>
+                <a:latin typeface="Calibri" pitchFamily="34" charset="0"/>
+                <a:ea typeface="Calibri" pitchFamily="34" charset="-122"/>
+                <a:cs typeface="Calibri" pitchFamily="34" charset="-120"/>
+              </a:rPr>
+              <a:t>11  Studio vs. Current Workflow</a:t>
+            </a:r>
+            <a:endParaRPr lang="en-US" sz="1100" dirty="0"/>
+          </a:p>
+        </p:txBody>
+      </p:sp>
+      <p:sp>
+        <p:nvSpPr>
+          <p:cNvPr id="23" name="Text 21"/>
+          <p:cNvSpPr/>
+          <p:nvPr/>
+        </p:nvSpPr>
+        <p:spPr>
+          <a:xfrm>
             <a:off x="4550664" y="4965192"/>
-            <a:ext cx="3060192" cy="256032"/>
-          </a:xfrm>
-          <a:prstGeom prst="rect">
-            <a:avLst/>
-          </a:prstGeom>
-          <a:noFill/>
-          <a:ln/>
-        </p:spPr>
-        <p:txBody>
-          <a:bodyPr wrap="square" lIns="0" tIns="0" rIns="0" bIns="0" rtlCol="0" anchor="t"/>
-          <a:lstStyle/>
-          <a:p>
-            <a:pPr algn="l" indent="0" marL="0">
-              <a:buNone/>
-            </a:pPr>
-            <a:r>
-              <a:rPr lang="en-US" sz="1150" dirty="0">
+            <a:ext cx="3060192" cy="237744"/>
+          </a:xfrm>
+          <a:prstGeom prst="rect">
+            <a:avLst/>
+          </a:prstGeom>
+          <a:noFill/>
+          <a:ln/>
+        </p:spPr>
+        <p:txBody>
+          <a:bodyPr wrap="square" lIns="0" tIns="0" rIns="0" bIns="0" rtlCol="0" anchor="t"/>
+          <a:lstStyle/>
+          <a:p>
+            <a:pPr algn="l" indent="0" marL="0">
+              <a:buNone/>
+            </a:pPr>
+            <a:r>
+              <a:rPr lang="en-US" sz="1100" dirty="0">
                 <a:solidFill>
                   <a:srgbClr val="0E3A4F"/>
                 </a:solidFill>
@@ -7825,38 +7864,38 @@
                 <a:ea typeface="Calibri" pitchFamily="34" charset="-122"/>
                 <a:cs typeface="Calibri" pitchFamily="34" charset="-120"/>
               </a:rPr>
-              <a:t>11  Studio vs. Current Workflow</a:t>
-            </a:r>
-            <a:endParaRPr lang="en-US" sz="1150" dirty="0"/>
-          </a:p>
-        </p:txBody>
-      </p:sp>
-      <p:sp>
-        <p:nvSpPr>
-          <p:cNvPr id="23" name="Text 21"/>
-          <p:cNvSpPr/>
-          <p:nvPr/>
-        </p:nvSpPr>
-        <p:spPr>
-          <a:xfrm>
-            <a:off x="4550664" y="5239512"/>
-            <a:ext cx="3060192" cy="256032"/>
-          </a:xfrm>
-          <a:prstGeom prst="rect">
-            <a:avLst/>
-          </a:prstGeom>
-          <a:noFill/>
-          <a:ln/>
-        </p:spPr>
-        <p:txBody>
-          <a:bodyPr wrap="square" lIns="0" tIns="0" rIns="0" bIns="0" rtlCol="0" anchor="t"/>
-          <a:lstStyle/>
-          <a:p>
-            <a:pPr algn="l" indent="0" marL="0">
-              <a:buNone/>
-            </a:pPr>
-            <a:r>
-              <a:rPr lang="en-US" sz="1150" dirty="0">
+              <a:t>12  Weekly Feedback Loop</a:t>
+            </a:r>
+            <a:endParaRPr lang="en-US" sz="1100" dirty="0"/>
+          </a:p>
+        </p:txBody>
+      </p:sp>
+      <p:sp>
+        <p:nvSpPr>
+          <p:cNvPr id="24" name="Text 22"/>
+          <p:cNvSpPr/>
+          <p:nvPr/>
+        </p:nvSpPr>
+        <p:spPr>
+          <a:xfrm>
+            <a:off x="4550664" y="5221224"/>
+            <a:ext cx="3060192" cy="237744"/>
+          </a:xfrm>
+          <a:prstGeom prst="rect">
+            <a:avLst/>
+          </a:prstGeom>
+          <a:noFill/>
+          <a:ln/>
+        </p:spPr>
+        <p:txBody>
+          <a:bodyPr wrap="square" lIns="0" tIns="0" rIns="0" bIns="0" rtlCol="0" anchor="t"/>
+          <a:lstStyle/>
+          <a:p>
+            <a:pPr algn="l" indent="0" marL="0">
+              <a:buNone/>
+            </a:pPr>
+            <a:r>
+              <a:rPr lang="en-US" sz="1100" dirty="0">
                 <a:solidFill>
                   <a:srgbClr val="0E3A4F"/>
                 </a:solidFill>
@@ -7864,48 +7903,9 @@
                 <a:ea typeface="Calibri" pitchFamily="34" charset="-122"/>
                 <a:cs typeface="Calibri" pitchFamily="34" charset="-120"/>
               </a:rPr>
-              <a:t>12  Weekly Feedback Loop</a:t>
-            </a:r>
-            <a:endParaRPr lang="en-US" sz="1150" dirty="0"/>
-          </a:p>
-        </p:txBody>
-      </p:sp>
-      <p:sp>
-        <p:nvSpPr>
-          <p:cNvPr id="24" name="Text 22"/>
-          <p:cNvSpPr/>
-          <p:nvPr/>
-        </p:nvSpPr>
-        <p:spPr>
-          <a:xfrm>
-            <a:off x="4550664" y="5513832"/>
-            <a:ext cx="3060192" cy="256032"/>
-          </a:xfrm>
-          <a:prstGeom prst="rect">
-            <a:avLst/>
-          </a:prstGeom>
-          <a:noFill/>
-          <a:ln/>
-        </p:spPr>
-        <p:txBody>
-          <a:bodyPr wrap="square" lIns="0" tIns="0" rIns="0" bIns="0" rtlCol="0" anchor="t"/>
-          <a:lstStyle/>
-          <a:p>
-            <a:pPr algn="l" indent="0" marL="0">
-              <a:buNone/>
-            </a:pPr>
-            <a:r>
-              <a:rPr lang="en-US" sz="1150" dirty="0">
-                <a:solidFill>
-                  <a:srgbClr val="0E3A4F"/>
-                </a:solidFill>
-                <a:latin typeface="Calibri" pitchFamily="34" charset="0"/>
-                <a:ea typeface="Calibri" pitchFamily="34" charset="-122"/>
-                <a:cs typeface="Calibri" pitchFamily="34" charset="-120"/>
-              </a:rPr>
               <a:t>13  Observing Real Underwriting</a:t>
             </a:r>
-            <a:endParaRPr lang="en-US" sz="1150" dirty="0"/>
+            <a:endParaRPr lang="en-US" sz="1100" dirty="0"/>
           </a:p>
         </p:txBody>
       </p:sp>
@@ -7918,11 +7918,11 @@
         <p:spPr>
           <a:xfrm>
             <a:off x="8122920" y="1783080"/>
-            <a:ext cx="3535680" cy="2121408"/>
+            <a:ext cx="3535680" cy="1901952"/>
           </a:xfrm>
           <a:prstGeom prst="roundRect">
             <a:avLst>
-              <a:gd name="adj" fmla="val 3448"/>
+              <a:gd name="adj" fmla="val 3846"/>
             </a:avLst>
           </a:prstGeom>
           <a:solidFill>
@@ -7990,24 +7990,24 @@
         </p:nvSpPr>
         <p:spPr>
           <a:xfrm>
-            <a:off x="8360664" y="2350008"/>
-            <a:ext cx="3060192" cy="256032"/>
-          </a:xfrm>
-          <a:prstGeom prst="rect">
-            <a:avLst/>
-          </a:prstGeom>
-          <a:noFill/>
-          <a:ln/>
-        </p:spPr>
-        <p:txBody>
-          <a:bodyPr wrap="square" lIns="0" tIns="0" rIns="0" bIns="0" rtlCol="0" anchor="t"/>
-          <a:lstStyle/>
-          <a:p>
-            <a:pPr algn="l" indent="0" marL="0">
-              <a:buNone/>
-            </a:pPr>
-            <a:r>
-              <a:rPr lang="en-US" sz="1150" dirty="0">
+            <a:off x="8360664" y="2313432"/>
+            <a:ext cx="3060192" cy="237744"/>
+          </a:xfrm>
+          <a:prstGeom prst="rect">
+            <a:avLst/>
+          </a:prstGeom>
+          <a:noFill/>
+          <a:ln/>
+        </p:spPr>
+        <p:txBody>
+          <a:bodyPr wrap="square" lIns="0" tIns="0" rIns="0" bIns="0" rtlCol="0" anchor="t"/>
+          <a:lstStyle/>
+          <a:p>
+            <a:pPr algn="l" indent="0" marL="0">
+              <a:buNone/>
+            </a:pPr>
+            <a:r>
+              <a:rPr lang="en-US" sz="1100" dirty="0">
                 <a:solidFill>
                   <a:srgbClr val="0E3A4F"/>
                 </a:solidFill>
@@ -8017,7 +8017,7 @@
               </a:rPr>
               <a:t>14  Tune in Jazz</a:t>
             </a:r>
-            <a:endParaRPr lang="en-US" sz="1150" dirty="0"/>
+            <a:endParaRPr lang="en-US" sz="1100" dirty="0"/>
           </a:p>
         </p:txBody>
       </p:sp>
@@ -8029,24 +8029,24 @@
         </p:nvSpPr>
         <p:spPr>
           <a:xfrm>
-            <a:off x="8360664" y="2624328"/>
-            <a:ext cx="3060192" cy="256032"/>
-          </a:xfrm>
-          <a:prstGeom prst="rect">
-            <a:avLst/>
-          </a:prstGeom>
-          <a:noFill/>
-          <a:ln/>
-        </p:spPr>
-        <p:txBody>
-          <a:bodyPr wrap="square" lIns="0" tIns="0" rIns="0" bIns="0" rtlCol="0" anchor="t"/>
-          <a:lstStyle/>
-          <a:p>
-            <a:pPr algn="l" indent="0" marL="0">
-              <a:buNone/>
-            </a:pPr>
-            <a:r>
-              <a:rPr lang="en-US" sz="1150" dirty="0">
+            <a:off x="8360664" y="2569464"/>
+            <a:ext cx="3060192" cy="237744"/>
+          </a:xfrm>
+          <a:prstGeom prst="rect">
+            <a:avLst/>
+          </a:prstGeom>
+          <a:noFill/>
+          <a:ln/>
+        </p:spPr>
+        <p:txBody>
+          <a:bodyPr wrap="square" lIns="0" tIns="0" rIns="0" bIns="0" rtlCol="0" anchor="t"/>
+          <a:lstStyle/>
+          <a:p>
+            <a:pPr algn="l" indent="0" marL="0">
+              <a:buNone/>
+            </a:pPr>
+            <a:r>
+              <a:rPr lang="en-US" sz="1100" dirty="0">
                 <a:solidFill>
                   <a:srgbClr val="0E3A4F"/>
                 </a:solidFill>
@@ -8056,7 +8056,7 @@
               </a:rPr>
               <a:t>15  Refining Prompts &amp; Recognition</a:t>
             </a:r>
-            <a:endParaRPr lang="en-US" sz="1150" dirty="0"/>
+            <a:endParaRPr lang="en-US" sz="1100" dirty="0"/>
           </a:p>
         </p:txBody>
       </p:sp>
@@ -8068,24 +8068,24 @@
         </p:nvSpPr>
         <p:spPr>
           <a:xfrm>
-            <a:off x="8360664" y="2898648"/>
-            <a:ext cx="3060192" cy="256032"/>
-          </a:xfrm>
-          <a:prstGeom prst="rect">
-            <a:avLst/>
-          </a:prstGeom>
-          <a:noFill/>
-          <a:ln/>
-        </p:spPr>
-        <p:txBody>
-          <a:bodyPr wrap="square" lIns="0" tIns="0" rIns="0" bIns="0" rtlCol="0" anchor="t"/>
-          <a:lstStyle/>
-          <a:p>
-            <a:pPr algn="l" indent="0" marL="0">
-              <a:buNone/>
-            </a:pPr>
-            <a:r>
-              <a:rPr lang="en-US" sz="1150" dirty="0">
+            <a:off x="8360664" y="2825496"/>
+            <a:ext cx="3060192" cy="237744"/>
+          </a:xfrm>
+          <a:prstGeom prst="rect">
+            <a:avLst/>
+          </a:prstGeom>
+          <a:noFill/>
+          <a:ln/>
+        </p:spPr>
+        <p:txBody>
+          <a:bodyPr wrap="square" lIns="0" tIns="0" rIns="0" bIns="0" rtlCol="0" anchor="t"/>
+          <a:lstStyle/>
+          <a:p>
+            <a:pPr algn="l" indent="0" marL="0">
+              <a:buNone/>
+            </a:pPr>
+            <a:r>
+              <a:rPr lang="en-US" sz="1100" dirty="0">
                 <a:solidFill>
                   <a:srgbClr val="0E3A4F"/>
                 </a:solidFill>
@@ -8095,7 +8095,7 @@
               </a:rPr>
               <a:t>16  Documenting Improvement</a:t>
             </a:r>
-            <a:endParaRPr lang="en-US" sz="1150" dirty="0"/>
+            <a:endParaRPr lang="en-US" sz="1100" dirty="0"/>
           </a:p>
         </p:txBody>
       </p:sp>
@@ -8107,24 +8107,24 @@
         </p:nvSpPr>
         <p:spPr>
           <a:xfrm>
-            <a:off x="8360664" y="3172968"/>
-            <a:ext cx="3060192" cy="256032"/>
-          </a:xfrm>
-          <a:prstGeom prst="rect">
-            <a:avLst/>
-          </a:prstGeom>
-          <a:noFill/>
-          <a:ln/>
-        </p:spPr>
-        <p:txBody>
-          <a:bodyPr wrap="square" lIns="0" tIns="0" rIns="0" bIns="0" rtlCol="0" anchor="t"/>
-          <a:lstStyle/>
-          <a:p>
-            <a:pPr algn="l" indent="0" marL="0">
-              <a:buNone/>
-            </a:pPr>
-            <a:r>
-              <a:rPr lang="en-US" sz="1150" dirty="0">
+            <a:off x="8360664" y="3081528"/>
+            <a:ext cx="3060192" cy="237744"/>
+          </a:xfrm>
+          <a:prstGeom prst="rect">
+            <a:avLst/>
+          </a:prstGeom>
+          <a:noFill/>
+          <a:ln/>
+        </p:spPr>
+        <p:txBody>
+          <a:bodyPr wrap="square" lIns="0" tIns="0" rIns="0" bIns="0" rtlCol="0" anchor="t"/>
+          <a:lstStyle/>
+          <a:p>
+            <a:pPr algn="l" indent="0" marL="0">
+              <a:buNone/>
+            </a:pPr>
+            <a:r>
+              <a:rPr lang="en-US" sz="1100" dirty="0">
                 <a:solidFill>
                   <a:srgbClr val="0E3A4F"/>
                 </a:solidFill>
@@ -8134,7 +8134,7 @@
               </a:rPr>
               <a:t>17  Next Technology Changes</a:t>
             </a:r>
-            <a:endParaRPr lang="en-US" sz="1150" dirty="0"/>
+            <a:endParaRPr lang="en-US" sz="1100" dirty="0"/>
           </a:p>
         </p:txBody>
       </p:sp>
@@ -8146,24 +8146,24 @@
         </p:nvSpPr>
         <p:spPr>
           <a:xfrm>
-            <a:off x="8360664" y="3447288"/>
-            <a:ext cx="3060192" cy="256032"/>
-          </a:xfrm>
-          <a:prstGeom prst="rect">
-            <a:avLst/>
-          </a:prstGeom>
-          <a:noFill/>
-          <a:ln/>
-        </p:spPr>
-        <p:txBody>
-          <a:bodyPr wrap="square" lIns="0" tIns="0" rIns="0" bIns="0" rtlCol="0" anchor="t"/>
-          <a:lstStyle/>
-          <a:p>
-            <a:pPr algn="l" indent="0" marL="0">
-              <a:buNone/>
-            </a:pPr>
-            <a:r>
-              <a:rPr lang="en-US" sz="1150" dirty="0">
+            <a:off x="8360664" y="3337560"/>
+            <a:ext cx="3060192" cy="237744"/>
+          </a:xfrm>
+          <a:prstGeom prst="rect">
+            <a:avLst/>
+          </a:prstGeom>
+          <a:noFill/>
+          <a:ln/>
+        </p:spPr>
+        <p:txBody>
+          <a:bodyPr wrap="square" lIns="0" tIns="0" rIns="0" bIns="0" rtlCol="0" anchor="t"/>
+          <a:lstStyle/>
+          <a:p>
+            <a:pPr algn="l" indent="0" marL="0">
+              <a:buNone/>
+            </a:pPr>
+            <a:r>
+              <a:rPr lang="en-US" sz="1100" dirty="0">
                 <a:solidFill>
                   <a:srgbClr val="0E3A4F"/>
                 </a:solidFill>
@@ -8173,19 +8173,248 @@
               </a:rPr>
               <a:t>18  Builder Studio &amp; Nuggets</a:t>
             </a:r>
-            <a:endParaRPr lang="en-US" sz="1150" dirty="0"/>
-          </a:p>
-        </p:txBody>
-      </p:sp>
-      <p:sp>
-        <p:nvSpPr>
-          <p:cNvPr id="32" name="Text 30"/>
-          <p:cNvSpPr/>
-          <p:nvPr/>
-        </p:nvSpPr>
-        <p:spPr>
-          <a:xfrm>
-            <a:off x="502920" y="5989320"/>
+            <a:endParaRPr lang="en-US" sz="1100" dirty="0"/>
+          </a:p>
+        </p:txBody>
+      </p:sp>
+      <p:sp>
+        <p:nvSpPr>
+          <p:cNvPr id="32" name="Shape 30"/>
+          <p:cNvSpPr/>
+          <p:nvPr/>
+        </p:nvSpPr>
+        <p:spPr>
+          <a:xfrm>
+            <a:off x="8122920" y="3922776"/>
+            <a:ext cx="3535680" cy="1645920"/>
+          </a:xfrm>
+          <a:prstGeom prst="roundRect">
+            <a:avLst>
+              <a:gd name="adj" fmla="val 4444"/>
+            </a:avLst>
+          </a:prstGeom>
+          <a:solidFill>
+            <a:srgbClr val="E8F1F4"/>
+          </a:solidFill>
+          <a:ln w="12700">
+            <a:solidFill>
+              <a:srgbClr val="D3E3E8"/>
+            </a:solidFill>
+            <a:prstDash val="solid"/>
+          </a:ln>
+          <a:effectLst>
+            <a:outerShdw sx="100000" sy="100000" kx="0" ky="0" algn="bl" rotWithShape="0" blurRad="127000" dist="25400" dir="5400000">
+              <a:srgbClr val="0E3A4F">
+                <a:alpha val="10000"/>
+              </a:srgbClr>
+            </a:outerShdw>
+          </a:effectLst>
+        </p:spPr>
+      </p:sp>
+      <p:sp>
+        <p:nvSpPr>
+          <p:cNvPr id="33" name="Text 31"/>
+          <p:cNvSpPr/>
+          <p:nvPr/>
+        </p:nvSpPr>
+        <p:spPr>
+          <a:xfrm>
+            <a:off x="8360664" y="4069080"/>
+            <a:ext cx="3060192" cy="310896"/>
+          </a:xfrm>
+          <a:prstGeom prst="rect">
+            <a:avLst/>
+          </a:prstGeom>
+          <a:noFill/>
+          <a:ln/>
+        </p:spPr>
+        <p:txBody>
+          <a:bodyPr wrap="square" lIns="0" tIns="0" rIns="0" bIns="0" rtlCol="0" anchor="t"/>
+          <a:lstStyle/>
+          <a:p>
+            <a:pPr algn="l" indent="0" marL="0">
+              <a:buNone/>
+            </a:pPr>
+            <a:r>
+              <a:rPr lang="en-US" sz="1250" b="1" dirty="0">
+                <a:solidFill>
+                  <a:srgbClr val="1B6B7C"/>
+                </a:solidFill>
+                <a:latin typeface="Cambria" pitchFamily="34" charset="0"/>
+                <a:ea typeface="Cambria" pitchFamily="34" charset="-122"/>
+                <a:cs typeface="Cambria" pitchFamily="34" charset="-120"/>
+              </a:rPr>
+              <a:t>Technology — Integrate &amp; Deploy</a:t>
+            </a:r>
+            <a:endParaRPr lang="en-US" sz="1250" dirty="0"/>
+          </a:p>
+        </p:txBody>
+      </p:sp>
+      <p:sp>
+        <p:nvSpPr>
+          <p:cNvPr id="34" name="Text 32"/>
+          <p:cNvSpPr/>
+          <p:nvPr/>
+        </p:nvSpPr>
+        <p:spPr>
+          <a:xfrm>
+            <a:off x="8360664" y="4453128"/>
+            <a:ext cx="3060192" cy="237744"/>
+          </a:xfrm>
+          <a:prstGeom prst="rect">
+            <a:avLst/>
+          </a:prstGeom>
+          <a:noFill/>
+          <a:ln/>
+        </p:spPr>
+        <p:txBody>
+          <a:bodyPr wrap="square" lIns="0" tIns="0" rIns="0" bIns="0" rtlCol="0" anchor="t"/>
+          <a:lstStyle/>
+          <a:p>
+            <a:pPr algn="l" indent="0" marL="0">
+              <a:buNone/>
+            </a:pPr>
+            <a:r>
+              <a:rPr lang="en-US" sz="1100" dirty="0">
+                <a:solidFill>
+                  <a:srgbClr val="0E3A4F"/>
+                </a:solidFill>
+                <a:latin typeface="Calibri" pitchFamily="34" charset="0"/>
+                <a:ea typeface="Calibri" pitchFamily="34" charset="-122"/>
+                <a:cs typeface="Calibri" pitchFamily="34" charset="-120"/>
+              </a:rPr>
+              <a:t>19  Triggering Loans to Jazz</a:t>
+            </a:r>
+            <a:endParaRPr lang="en-US" sz="1100" dirty="0"/>
+          </a:p>
+        </p:txBody>
+      </p:sp>
+      <p:sp>
+        <p:nvSpPr>
+          <p:cNvPr id="35" name="Text 33"/>
+          <p:cNvSpPr/>
+          <p:nvPr/>
+        </p:nvSpPr>
+        <p:spPr>
+          <a:xfrm>
+            <a:off x="8360664" y="4709160"/>
+            <a:ext cx="3060192" cy="237744"/>
+          </a:xfrm>
+          <a:prstGeom prst="rect">
+            <a:avLst/>
+          </a:prstGeom>
+          <a:noFill/>
+          <a:ln/>
+        </p:spPr>
+        <p:txBody>
+          <a:bodyPr wrap="square" lIns="0" tIns="0" rIns="0" bIns="0" rtlCol="0" anchor="t"/>
+          <a:lstStyle/>
+          <a:p>
+            <a:pPr algn="l" indent="0" marL="0">
+              <a:buNone/>
+            </a:pPr>
+            <a:r>
+              <a:rPr lang="en-US" sz="1100" dirty="0">
+                <a:solidFill>
+                  <a:srgbClr val="0E3A4F"/>
+                </a:solidFill>
+                <a:latin typeface="Calibri" pitchFamily="34" charset="0"/>
+                <a:ea typeface="Calibri" pitchFamily="34" charset="-122"/>
+                <a:cs typeface="Calibri" pitchFamily="34" charset="-120"/>
+              </a:rPr>
+              <a:t>20  LOS Extraction &amp; Write-Back</a:t>
+            </a:r>
+            <a:endParaRPr lang="en-US" sz="1100" dirty="0"/>
+          </a:p>
+        </p:txBody>
+      </p:sp>
+      <p:sp>
+        <p:nvSpPr>
+          <p:cNvPr id="36" name="Text 34"/>
+          <p:cNvSpPr/>
+          <p:nvPr/>
+        </p:nvSpPr>
+        <p:spPr>
+          <a:xfrm>
+            <a:off x="8360664" y="4965192"/>
+            <a:ext cx="3060192" cy="237744"/>
+          </a:xfrm>
+          <a:prstGeom prst="rect">
+            <a:avLst/>
+          </a:prstGeom>
+          <a:noFill/>
+          <a:ln/>
+        </p:spPr>
+        <p:txBody>
+          <a:bodyPr wrap="square" lIns="0" tIns="0" rIns="0" bIns="0" rtlCol="0" anchor="t"/>
+          <a:lstStyle/>
+          <a:p>
+            <a:pPr algn="l" indent="0" marL="0">
+              <a:buNone/>
+            </a:pPr>
+            <a:r>
+              <a:rPr lang="en-US" sz="1100" dirty="0">
+                <a:solidFill>
+                  <a:srgbClr val="0E3A4F"/>
+                </a:solidFill>
+                <a:latin typeface="Calibri" pitchFamily="34" charset="0"/>
+                <a:ea typeface="Calibri" pitchFamily="34" charset="-122"/>
+                <a:cs typeface="Calibri" pitchFamily="34" charset="-120"/>
+              </a:rPr>
+              <a:t>21  MU Conditions Integration</a:t>
+            </a:r>
+            <a:endParaRPr lang="en-US" sz="1100" dirty="0"/>
+          </a:p>
+        </p:txBody>
+      </p:sp>
+      <p:sp>
+        <p:nvSpPr>
+          <p:cNvPr id="37" name="Text 35"/>
+          <p:cNvSpPr/>
+          <p:nvPr/>
+        </p:nvSpPr>
+        <p:spPr>
+          <a:xfrm>
+            <a:off x="8360664" y="5221224"/>
+            <a:ext cx="3060192" cy="237744"/>
+          </a:xfrm>
+          <a:prstGeom prst="rect">
+            <a:avLst/>
+          </a:prstGeom>
+          <a:noFill/>
+          <a:ln/>
+        </p:spPr>
+        <p:txBody>
+          <a:bodyPr wrap="square" lIns="0" tIns="0" rIns="0" bIns="0" rtlCol="0" anchor="t"/>
+          <a:lstStyle/>
+          <a:p>
+            <a:pPr algn="l" indent="0" marL="0">
+              <a:buNone/>
+            </a:pPr>
+            <a:r>
+              <a:rPr lang="en-US" sz="1100" dirty="0">
+                <a:solidFill>
+                  <a:srgbClr val="0E3A4F"/>
+                </a:solidFill>
+                <a:latin typeface="Calibri" pitchFamily="34" charset="0"/>
+                <a:ea typeface="Calibri" pitchFamily="34" charset="-122"/>
+                <a:cs typeface="Calibri" pitchFamily="34" charset="-120"/>
+              </a:rPr>
+              <a:t>22  Minimum-Change Deployment</a:t>
+            </a:r>
+            <a:endParaRPr lang="en-US" sz="1100" dirty="0"/>
+          </a:p>
+        </p:txBody>
+      </p:sp>
+      <p:sp>
+        <p:nvSpPr>
+          <p:cNvPr id="38" name="Text 36"/>
+          <p:cNvSpPr/>
+          <p:nvPr/>
+        </p:nvSpPr>
+        <p:spPr>
+          <a:xfrm>
+            <a:off x="502920" y="5779008"/>
             <a:ext cx="11155680" cy="365760"/>
           </a:xfrm>
           <a:prstGeom prst="rect">

--- a/jazzx-design-studio/JazzX-Design-Studio-Executive-Summary.pptx
+++ b/jazzx-design-studio/JazzX-Design-Studio-Executive-Summary.pptx
@@ -7104,7 +7104,7 @@
                 <a:ea typeface="Calibri" pitchFamily="34" charset="-122"/>
                 <a:cs typeface="Calibri" pitchFamily="34" charset="-120"/>
               </a:rPr>
-              <a:t>22 one-pagers, each with purpose, RACI, decisions, framework, templates, cadence, definition of done and risks.</a:t>
+              <a:t>29 one-pagers, each with purpose, RACI, decisions, framework, templates, cadence, definition of done and risks.</a:t>
             </a:r>
             <a:endParaRPr lang="en-US" sz="1400" dirty="0"/>
           </a:p>
@@ -7119,11 +7119,11 @@
         <p:spPr>
           <a:xfrm>
             <a:off x="502920" y="1783080"/>
-            <a:ext cx="3535680" cy="877824"/>
+            <a:ext cx="2624328" cy="813816"/>
           </a:xfrm>
           <a:prstGeom prst="roundRect">
             <a:avLst>
-              <a:gd name="adj" fmla="val 8333"/>
+              <a:gd name="adj" fmla="val 8989"/>
             </a:avLst>
           </a:prstGeom>
           <a:solidFill>
@@ -7152,24 +7152,24 @@
         </p:nvSpPr>
         <p:spPr>
           <a:xfrm>
-            <a:off x="740664" y="1929384"/>
-            <a:ext cx="3060192" cy="310896"/>
-          </a:xfrm>
-          <a:prstGeom prst="rect">
-            <a:avLst/>
-          </a:prstGeom>
-          <a:noFill/>
-          <a:ln/>
-        </p:spPr>
-        <p:txBody>
-          <a:bodyPr wrap="square" lIns="0" tIns="0" rIns="0" bIns="0" rtlCol="0" anchor="t"/>
-          <a:lstStyle/>
-          <a:p>
-            <a:pPr algn="l" indent="0" marL="0">
-              <a:buNone/>
-            </a:pPr>
-            <a:r>
-              <a:rPr lang="en-US" sz="1250" b="1" dirty="0">
+            <a:off x="722376" y="1920240"/>
+            <a:ext cx="2185416" cy="274320"/>
+          </a:xfrm>
+          <a:prstGeom prst="rect">
+            <a:avLst/>
+          </a:prstGeom>
+          <a:noFill/>
+          <a:ln/>
+        </p:spPr>
+        <p:txBody>
+          <a:bodyPr wrap="square" lIns="0" tIns="0" rIns="0" bIns="0" rtlCol="0" anchor="t"/>
+          <a:lstStyle/>
+          <a:p>
+            <a:pPr algn="l" indent="0" marL="0">
+              <a:buNone/>
+            </a:pPr>
+            <a:r>
+              <a:rPr lang="en-US" sz="1150" b="1" dirty="0">
                 <a:solidFill>
                   <a:srgbClr val="1B6B7C"/>
                 </a:solidFill>
@@ -7179,7 +7179,7 @@
               </a:rPr>
               <a:t>Program</a:t>
             </a:r>
-            <a:endParaRPr lang="en-US" sz="1250" dirty="0"/>
+            <a:endParaRPr lang="en-US" sz="1150" dirty="0"/>
           </a:p>
         </p:txBody>
       </p:sp>
@@ -7191,24 +7191,24 @@
         </p:nvSpPr>
         <p:spPr>
           <a:xfrm>
-            <a:off x="740664" y="2313432"/>
-            <a:ext cx="3060192" cy="237744"/>
-          </a:xfrm>
-          <a:prstGeom prst="rect">
-            <a:avLst/>
-          </a:prstGeom>
-          <a:noFill/>
-          <a:ln/>
-        </p:spPr>
-        <p:txBody>
-          <a:bodyPr wrap="square" lIns="0" tIns="0" rIns="0" bIns="0" rtlCol="0" anchor="t"/>
-          <a:lstStyle/>
-          <a:p>
-            <a:pPr algn="l" indent="0" marL="0">
-              <a:buNone/>
-            </a:pPr>
-            <a:r>
-              <a:rPr lang="en-US" sz="1100" dirty="0">
+            <a:off x="722376" y="2240280"/>
+            <a:ext cx="2185416" cy="228600"/>
+          </a:xfrm>
+          <a:prstGeom prst="rect">
+            <a:avLst/>
+          </a:prstGeom>
+          <a:noFill/>
+          <a:ln/>
+        </p:spPr>
+        <p:txBody>
+          <a:bodyPr wrap="square" lIns="0" tIns="0" rIns="0" bIns="0" rtlCol="0" anchor="t"/>
+          <a:lstStyle/>
+          <a:p>
+            <a:pPr algn="l" indent="0" marL="0">
+              <a:buNone/>
+            </a:pPr>
+            <a:r>
+              <a:rPr lang="en-US" sz="1000" dirty="0">
                 <a:solidFill>
                   <a:srgbClr val="0E3A4F"/>
                 </a:solidFill>
@@ -7218,7 +7218,7 @@
               </a:rPr>
               <a:t>01  Master 90-Day Plan</a:t>
             </a:r>
-            <a:endParaRPr lang="en-US" sz="1100" dirty="0"/>
+            <a:endParaRPr lang="en-US" sz="1000" dirty="0"/>
           </a:p>
         </p:txBody>
       </p:sp>
@@ -7230,12 +7230,12 @@
         </p:nvSpPr>
         <p:spPr>
           <a:xfrm>
-            <a:off x="502920" y="2898648"/>
-            <a:ext cx="3535680" cy="1389888"/>
+            <a:off x="502920" y="2816352"/>
+            <a:ext cx="2624328" cy="1554480"/>
           </a:xfrm>
           <a:prstGeom prst="roundRect">
             <a:avLst>
-              <a:gd name="adj" fmla="val 5263"/>
+              <a:gd name="adj" fmla="val 4706"/>
             </a:avLst>
           </a:prstGeom>
           <a:solidFill>
@@ -7264,24 +7264,24 @@
         </p:nvSpPr>
         <p:spPr>
           <a:xfrm>
-            <a:off x="740664" y="3044952"/>
-            <a:ext cx="3060192" cy="310896"/>
-          </a:xfrm>
-          <a:prstGeom prst="rect">
-            <a:avLst/>
-          </a:prstGeom>
-          <a:noFill/>
-          <a:ln/>
-        </p:spPr>
-        <p:txBody>
-          <a:bodyPr wrap="square" lIns="0" tIns="0" rIns="0" bIns="0" rtlCol="0" anchor="t"/>
-          <a:lstStyle/>
-          <a:p>
-            <a:pPr algn="l" indent="0" marL="0">
-              <a:buNone/>
-            </a:pPr>
-            <a:r>
-              <a:rPr lang="en-US" sz="1250" b="1" dirty="0">
+            <a:off x="722376" y="2953512"/>
+            <a:ext cx="2185416" cy="274320"/>
+          </a:xfrm>
+          <a:prstGeom prst="rect">
+            <a:avLst/>
+          </a:prstGeom>
+          <a:noFill/>
+          <a:ln/>
+        </p:spPr>
+        <p:txBody>
+          <a:bodyPr wrap="square" lIns="0" tIns="0" rIns="0" bIns="0" rtlCol="0" anchor="t"/>
+          <a:lstStyle/>
+          <a:p>
+            <a:pPr algn="l" indent="0" marL="0">
+              <a:buNone/>
+            </a:pPr>
+            <a:r>
+              <a:rPr lang="en-US" sz="1150" b="1" dirty="0">
                 <a:solidFill>
                   <a:srgbClr val="1B6B7C"/>
                 </a:solidFill>
@@ -7289,9 +7289,9 @@
                 <a:ea typeface="Cambria" pitchFamily="34" charset="-122"/>
                 <a:cs typeface="Cambria" pitchFamily="34" charset="-120"/>
               </a:rPr>
-              <a:t>Logistics — Production Readiness</a:t>
-            </a:r>
-            <a:endParaRPr lang="en-US" sz="1250" dirty="0"/>
+              <a:t>Commercial Alignment</a:t>
+            </a:r>
+            <a:endParaRPr lang="en-US" sz="1150" dirty="0"/>
           </a:p>
         </p:txBody>
       </p:sp>
@@ -7303,24 +7303,24 @@
         </p:nvSpPr>
         <p:spPr>
           <a:xfrm>
-            <a:off x="740664" y="3429000"/>
-            <a:ext cx="3060192" cy="237744"/>
-          </a:xfrm>
-          <a:prstGeom prst="rect">
-            <a:avLst/>
-          </a:prstGeom>
-          <a:noFill/>
-          <a:ln/>
-        </p:spPr>
-        <p:txBody>
-          <a:bodyPr wrap="square" lIns="0" tIns="0" rIns="0" bIns="0" rtlCol="0" anchor="t"/>
-          <a:lstStyle/>
-          <a:p>
-            <a:pPr algn="l" indent="0" marL="0">
-              <a:buNone/>
-            </a:pPr>
-            <a:r>
-              <a:rPr lang="en-US" sz="1100" dirty="0">
+            <a:off x="722376" y="3273552"/>
+            <a:ext cx="2185416" cy="228600"/>
+          </a:xfrm>
+          <a:prstGeom prst="rect">
+            <a:avLst/>
+          </a:prstGeom>
+          <a:noFill/>
+          <a:ln/>
+        </p:spPr>
+        <p:txBody>
+          <a:bodyPr wrap="square" lIns="0" tIns="0" rIns="0" bIns="0" rtlCol="0" anchor="t"/>
+          <a:lstStyle/>
+          <a:p>
+            <a:pPr algn="l" indent="0" marL="0">
+              <a:buNone/>
+            </a:pPr>
+            <a:r>
+              <a:rPr lang="en-US" sz="1000" dirty="0">
                 <a:solidFill>
                   <a:srgbClr val="0E3A4F"/>
                 </a:solidFill>
@@ -7328,9 +7328,9 @@
                 <a:ea typeface="Calibri" pitchFamily="34" charset="-122"/>
                 <a:cs typeface="Calibri" pitchFamily="34" charset="-120"/>
               </a:rPr>
-              <a:t>02  Governance Structure</a:t>
-            </a:r>
-            <a:endParaRPr lang="en-US" sz="1100" dirty="0"/>
+              <a:t>23  Cost &amp; Timeline</a:t>
+            </a:r>
+            <a:endParaRPr lang="en-US" sz="1000" dirty="0"/>
           </a:p>
         </p:txBody>
       </p:sp>
@@ -7342,24 +7342,24 @@
         </p:nvSpPr>
         <p:spPr>
           <a:xfrm>
-            <a:off x="740664" y="3685032"/>
-            <a:ext cx="3060192" cy="237744"/>
-          </a:xfrm>
-          <a:prstGeom prst="rect">
-            <a:avLst/>
-          </a:prstGeom>
-          <a:noFill/>
-          <a:ln/>
-        </p:spPr>
-        <p:txBody>
-          <a:bodyPr wrap="square" lIns="0" tIns="0" rIns="0" bIns="0" rtlCol="0" anchor="t"/>
-          <a:lstStyle/>
-          <a:p>
-            <a:pPr algn="l" indent="0" marL="0">
-              <a:buNone/>
-            </a:pPr>
-            <a:r>
-              <a:rPr lang="en-US" sz="1100" dirty="0">
+            <a:off x="722376" y="3520440"/>
+            <a:ext cx="2185416" cy="228600"/>
+          </a:xfrm>
+          <a:prstGeom prst="rect">
+            <a:avLst/>
+          </a:prstGeom>
+          <a:noFill/>
+          <a:ln/>
+        </p:spPr>
+        <p:txBody>
+          <a:bodyPr wrap="square" lIns="0" tIns="0" rIns="0" bIns="0" rtlCol="0" anchor="t"/>
+          <a:lstStyle/>
+          <a:p>
+            <a:pPr algn="l" indent="0" marL="0">
+              <a:buNone/>
+            </a:pPr>
+            <a:r>
+              <a:rPr lang="en-US" sz="1000" dirty="0">
                 <a:solidFill>
                   <a:srgbClr val="0E3A4F"/>
                 </a:solidFill>
@@ -7367,9 +7367,9 @@
                 <a:ea typeface="Calibri" pitchFamily="34" charset="-122"/>
                 <a:cs typeface="Calibri" pitchFamily="34" charset="-120"/>
               </a:rPr>
-              <a:t>03  Borrower &amp; Internal Communications</a:t>
-            </a:r>
-            <a:endParaRPr lang="en-US" sz="1100" dirty="0"/>
+              <a:t>24  Scope Definition</a:t>
+            </a:r>
+            <a:endParaRPr lang="en-US" sz="1000" dirty="0"/>
           </a:p>
         </p:txBody>
       </p:sp>
@@ -7381,24 +7381,24 @@
         </p:nvSpPr>
         <p:spPr>
           <a:xfrm>
-            <a:off x="740664" y="3941064"/>
-            <a:ext cx="3060192" cy="237744"/>
-          </a:xfrm>
-          <a:prstGeom prst="rect">
-            <a:avLst/>
-          </a:prstGeom>
-          <a:noFill/>
-          <a:ln/>
-        </p:spPr>
-        <p:txBody>
-          <a:bodyPr wrap="square" lIns="0" tIns="0" rIns="0" bIns="0" rtlCol="0" anchor="t"/>
-          <a:lstStyle/>
-          <a:p>
-            <a:pPr algn="l" indent="0" marL="0">
-              <a:buNone/>
-            </a:pPr>
-            <a:r>
-              <a:rPr lang="en-US" sz="1100" dirty="0">
+            <a:off x="722376" y="3767328"/>
+            <a:ext cx="2185416" cy="228600"/>
+          </a:xfrm>
+          <a:prstGeom prst="rect">
+            <a:avLst/>
+          </a:prstGeom>
+          <a:noFill/>
+          <a:ln/>
+        </p:spPr>
+        <p:txBody>
+          <a:bodyPr wrap="square" lIns="0" tIns="0" rIns="0" bIns="0" rtlCol="0" anchor="t"/>
+          <a:lstStyle/>
+          <a:p>
+            <a:pPr algn="l" indent="0" marL="0">
+              <a:buNone/>
+            </a:pPr>
+            <a:r>
+              <a:rPr lang="en-US" sz="1000" dirty="0">
                 <a:solidFill>
                   <a:srgbClr val="0E3A4F"/>
                 </a:solidFill>
@@ -7406,26 +7406,65 @@
                 <a:ea typeface="Calibri" pitchFamily="34" charset="-122"/>
                 <a:cs typeface="Calibri" pitchFamily="34" charset="-120"/>
               </a:rPr>
-              <a:t>04  Change Management</a:t>
-            </a:r>
-            <a:endParaRPr lang="en-US" sz="1100" dirty="0"/>
-          </a:p>
-        </p:txBody>
-      </p:sp>
-      <p:sp>
-        <p:nvSpPr>
-          <p:cNvPr id="12" name="Shape 10"/>
-          <p:cNvSpPr/>
-          <p:nvPr/>
-        </p:nvSpPr>
-        <p:spPr>
-          <a:xfrm>
-            <a:off x="4312920" y="1783080"/>
-            <a:ext cx="3535680" cy="1389888"/>
+              <a:t>25  Statement of Work</a:t>
+            </a:r>
+            <a:endParaRPr lang="en-US" sz="1000" dirty="0"/>
+          </a:p>
+        </p:txBody>
+      </p:sp>
+      <p:sp>
+        <p:nvSpPr>
+          <p:cNvPr id="12" name="Text 10"/>
+          <p:cNvSpPr/>
+          <p:nvPr/>
+        </p:nvSpPr>
+        <p:spPr>
+          <a:xfrm>
+            <a:off x="722376" y="4014216"/>
+            <a:ext cx="2185416" cy="228600"/>
+          </a:xfrm>
+          <a:prstGeom prst="rect">
+            <a:avLst/>
+          </a:prstGeom>
+          <a:noFill/>
+          <a:ln/>
+        </p:spPr>
+        <p:txBody>
+          <a:bodyPr wrap="square" lIns="0" tIns="0" rIns="0" bIns="0" rtlCol="0" anchor="t"/>
+          <a:lstStyle/>
+          <a:p>
+            <a:pPr algn="l" indent="0" marL="0">
+              <a:buNone/>
+            </a:pPr>
+            <a:r>
+              <a:rPr lang="en-US" sz="1000" dirty="0">
+                <a:solidFill>
+                  <a:srgbClr val="0E3A4F"/>
+                </a:solidFill>
+                <a:latin typeface="Calibri" pitchFamily="34" charset="0"/>
+                <a:ea typeface="Calibri" pitchFamily="34" charset="-122"/>
+                <a:cs typeface="Calibri" pitchFamily="34" charset="-120"/>
+              </a:rPr>
+              <a:t>26  Master Services Agreement</a:t>
+            </a:r>
+            <a:endParaRPr lang="en-US" sz="1000" dirty="0"/>
+          </a:p>
+        </p:txBody>
+      </p:sp>
+      <p:sp>
+        <p:nvSpPr>
+          <p:cNvPr id="13" name="Shape 11"/>
+          <p:cNvSpPr/>
+          <p:nvPr/>
+        </p:nvSpPr>
+        <p:spPr>
+          <a:xfrm>
+            <a:off x="3346704" y="1783080"/>
+            <a:ext cx="2624328" cy="1801368"/>
           </a:xfrm>
           <a:prstGeom prst="roundRect">
             <a:avLst>
-              <a:gd name="adj" fmla="val 5263"/>
+              <a:gd name="adj" fmla="val 4061"/>
             </a:avLst>
           </a:prstGeom>
           <a:solidFill>
@@ -7448,30 +7487,30 @@
       </p:sp>
       <p:sp>
         <p:nvSpPr>
-          <p:cNvPr id="13" name="Text 11"/>
-          <p:cNvSpPr/>
-          <p:nvPr/>
-        </p:nvSpPr>
-        <p:spPr>
-          <a:xfrm>
-            <a:off x="4550664" y="1929384"/>
-            <a:ext cx="3060192" cy="310896"/>
-          </a:xfrm>
-          <a:prstGeom prst="rect">
-            <a:avLst/>
-          </a:prstGeom>
-          <a:noFill/>
-          <a:ln/>
-        </p:spPr>
-        <p:txBody>
-          <a:bodyPr wrap="square" lIns="0" tIns="0" rIns="0" bIns="0" rtlCol="0" anchor="t"/>
-          <a:lstStyle/>
-          <a:p>
-            <a:pPr algn="l" indent="0" marL="0">
-              <a:buNone/>
-            </a:pPr>
-            <a:r>
-              <a:rPr lang="en-US" sz="1250" b="1" dirty="0">
+          <p:cNvPr id="14" name="Text 12"/>
+          <p:cNvSpPr/>
+          <p:nvPr/>
+        </p:nvSpPr>
+        <p:spPr>
+          <a:xfrm>
+            <a:off x="3566160" y="1920240"/>
+            <a:ext cx="2185416" cy="274320"/>
+          </a:xfrm>
+          <a:prstGeom prst="rect">
+            <a:avLst/>
+          </a:prstGeom>
+          <a:noFill/>
+          <a:ln/>
+        </p:spPr>
+        <p:txBody>
+          <a:bodyPr wrap="square" lIns="0" tIns="0" rIns="0" bIns="0" rtlCol="0" anchor="t"/>
+          <a:lstStyle/>
+          <a:p>
+            <a:pPr algn="l" indent="0" marL="0">
+              <a:buNone/>
+            </a:pPr>
+            <a:r>
+              <a:rPr lang="en-US" sz="1150" b="1" dirty="0">
                 <a:solidFill>
                   <a:srgbClr val="1B6B7C"/>
                 </a:solidFill>
@@ -7479,38 +7518,38 @@
                 <a:ea typeface="Cambria" pitchFamily="34" charset="-122"/>
                 <a:cs typeface="Cambria" pitchFamily="34" charset="-120"/>
               </a:rPr>
-              <a:t>Logistics — Define Proof of Value</a:t>
-            </a:r>
-            <a:endParaRPr lang="en-US" sz="1250" dirty="0"/>
-          </a:p>
-        </p:txBody>
-      </p:sp>
-      <p:sp>
-        <p:nvSpPr>
-          <p:cNvPr id="14" name="Text 12"/>
-          <p:cNvSpPr/>
-          <p:nvPr/>
-        </p:nvSpPr>
-        <p:spPr>
-          <a:xfrm>
-            <a:off x="4550664" y="2313432"/>
-            <a:ext cx="3060192" cy="237744"/>
-          </a:xfrm>
-          <a:prstGeom prst="rect">
-            <a:avLst/>
-          </a:prstGeom>
-          <a:noFill/>
-          <a:ln/>
-        </p:spPr>
-        <p:txBody>
-          <a:bodyPr wrap="square" lIns="0" tIns="0" rIns="0" bIns="0" rtlCol="0" anchor="t"/>
-          <a:lstStyle/>
-          <a:p>
-            <a:pPr algn="l" indent="0" marL="0">
-              <a:buNone/>
-            </a:pPr>
-            <a:r>
-              <a:rPr lang="en-US" sz="1100" dirty="0">
+              <a:t>Production Readiness</a:t>
+            </a:r>
+            <a:endParaRPr lang="en-US" sz="1150" dirty="0"/>
+          </a:p>
+        </p:txBody>
+      </p:sp>
+      <p:sp>
+        <p:nvSpPr>
+          <p:cNvPr id="15" name="Text 13"/>
+          <p:cNvSpPr/>
+          <p:nvPr/>
+        </p:nvSpPr>
+        <p:spPr>
+          <a:xfrm>
+            <a:off x="3566160" y="2240280"/>
+            <a:ext cx="2185416" cy="228600"/>
+          </a:xfrm>
+          <a:prstGeom prst="rect">
+            <a:avLst/>
+          </a:prstGeom>
+          <a:noFill/>
+          <a:ln/>
+        </p:spPr>
+        <p:txBody>
+          <a:bodyPr wrap="square" lIns="0" tIns="0" rIns="0" bIns="0" rtlCol="0" anchor="t"/>
+          <a:lstStyle/>
+          <a:p>
+            <a:pPr algn="l" indent="0" marL="0">
+              <a:buNone/>
+            </a:pPr>
+            <a:r>
+              <a:rPr lang="en-US" sz="1000" dirty="0">
                 <a:solidFill>
                   <a:srgbClr val="0E3A4F"/>
                 </a:solidFill>
@@ -7518,38 +7557,38 @@
                 <a:ea typeface="Calibri" pitchFamily="34" charset="-122"/>
                 <a:cs typeface="Calibri" pitchFamily="34" charset="-120"/>
               </a:rPr>
-              <a:t>05  Define What Value Looks Like</a:t>
-            </a:r>
-            <a:endParaRPr lang="en-US" sz="1100" dirty="0"/>
-          </a:p>
-        </p:txBody>
-      </p:sp>
-      <p:sp>
-        <p:nvSpPr>
-          <p:cNvPr id="15" name="Text 13"/>
-          <p:cNvSpPr/>
-          <p:nvPr/>
-        </p:nvSpPr>
-        <p:spPr>
-          <a:xfrm>
-            <a:off x="4550664" y="2569464"/>
-            <a:ext cx="3060192" cy="237744"/>
-          </a:xfrm>
-          <a:prstGeom prst="rect">
-            <a:avLst/>
-          </a:prstGeom>
-          <a:noFill/>
-          <a:ln/>
-        </p:spPr>
-        <p:txBody>
-          <a:bodyPr wrap="square" lIns="0" tIns="0" rIns="0" bIns="0" rtlCol="0" anchor="t"/>
-          <a:lstStyle/>
-          <a:p>
-            <a:pPr algn="l" indent="0" marL="0">
-              <a:buNone/>
-            </a:pPr>
-            <a:r>
-              <a:rPr lang="en-US" sz="1100" dirty="0">
+              <a:t>02  Governance Structure</a:t>
+            </a:r>
+            <a:endParaRPr lang="en-US" sz="1000" dirty="0"/>
+          </a:p>
+        </p:txBody>
+      </p:sp>
+      <p:sp>
+        <p:nvSpPr>
+          <p:cNvPr id="16" name="Text 14"/>
+          <p:cNvSpPr/>
+          <p:nvPr/>
+        </p:nvSpPr>
+        <p:spPr>
+          <a:xfrm>
+            <a:off x="3566160" y="2487168"/>
+            <a:ext cx="2185416" cy="228600"/>
+          </a:xfrm>
+          <a:prstGeom prst="rect">
+            <a:avLst/>
+          </a:prstGeom>
+          <a:noFill/>
+          <a:ln/>
+        </p:spPr>
+        <p:txBody>
+          <a:bodyPr wrap="square" lIns="0" tIns="0" rIns="0" bIns="0" rtlCol="0" anchor="t"/>
+          <a:lstStyle/>
+          <a:p>
+            <a:pPr algn="l" indent="0" marL="0">
+              <a:buNone/>
+            </a:pPr>
+            <a:r>
+              <a:rPr lang="en-US" sz="1000" dirty="0">
                 <a:solidFill>
                   <a:srgbClr val="0E3A4F"/>
                 </a:solidFill>
@@ -7557,38 +7596,38 @@
                 <a:ea typeface="Calibri" pitchFamily="34" charset="-122"/>
                 <a:cs typeface="Calibri" pitchFamily="34" charset="-120"/>
               </a:rPr>
-              <a:t>06  Baseline, Targets &amp; Thresholds</a:t>
-            </a:r>
-            <a:endParaRPr lang="en-US" sz="1100" dirty="0"/>
-          </a:p>
-        </p:txBody>
-      </p:sp>
-      <p:sp>
-        <p:nvSpPr>
-          <p:cNvPr id="16" name="Text 14"/>
-          <p:cNvSpPr/>
-          <p:nvPr/>
-        </p:nvSpPr>
-        <p:spPr>
-          <a:xfrm>
-            <a:off x="4550664" y="2825496"/>
-            <a:ext cx="3060192" cy="237744"/>
-          </a:xfrm>
-          <a:prstGeom prst="rect">
-            <a:avLst/>
-          </a:prstGeom>
-          <a:noFill/>
-          <a:ln/>
-        </p:spPr>
-        <p:txBody>
-          <a:bodyPr wrap="square" lIns="0" tIns="0" rIns="0" bIns="0" rtlCol="0" anchor="t"/>
-          <a:lstStyle/>
-          <a:p>
-            <a:pPr algn="l" indent="0" marL="0">
-              <a:buNone/>
-            </a:pPr>
-            <a:r>
-              <a:rPr lang="en-US" sz="1100" dirty="0">
+              <a:t>03  Borrower &amp; Internal Comms</a:t>
+            </a:r>
+            <a:endParaRPr lang="en-US" sz="1000" dirty="0"/>
+          </a:p>
+        </p:txBody>
+      </p:sp>
+      <p:sp>
+        <p:nvSpPr>
+          <p:cNvPr id="17" name="Text 15"/>
+          <p:cNvSpPr/>
+          <p:nvPr/>
+        </p:nvSpPr>
+        <p:spPr>
+          <a:xfrm>
+            <a:off x="3566160" y="2734056"/>
+            <a:ext cx="2185416" cy="228600"/>
+          </a:xfrm>
+          <a:prstGeom prst="rect">
+            <a:avLst/>
+          </a:prstGeom>
+          <a:noFill/>
+          <a:ln/>
+        </p:spPr>
+        <p:txBody>
+          <a:bodyPr wrap="square" lIns="0" tIns="0" rIns="0" bIns="0" rtlCol="0" anchor="t"/>
+          <a:lstStyle/>
+          <a:p>
+            <a:pPr algn="l" indent="0" marL="0">
+              <a:buNone/>
+            </a:pPr>
+            <a:r>
+              <a:rPr lang="en-US" sz="1000" dirty="0">
                 <a:solidFill>
                   <a:srgbClr val="0E3A4F"/>
                 </a:solidFill>
@@ -7596,26 +7635,104 @@
                 <a:ea typeface="Calibri" pitchFamily="34" charset="-122"/>
                 <a:cs typeface="Calibri" pitchFamily="34" charset="-120"/>
               </a:rPr>
-              <a:t>07  Go / No-Go Decision Criteria</a:t>
-            </a:r>
-            <a:endParaRPr lang="en-US" sz="1100" dirty="0"/>
-          </a:p>
-        </p:txBody>
-      </p:sp>
-      <p:sp>
-        <p:nvSpPr>
-          <p:cNvPr id="17" name="Shape 15"/>
-          <p:cNvSpPr/>
-          <p:nvPr/>
-        </p:nvSpPr>
-        <p:spPr>
-          <a:xfrm>
-            <a:off x="4312920" y="3410712"/>
-            <a:ext cx="3535680" cy="2157984"/>
+              <a:t>04  Change Management</a:t>
+            </a:r>
+            <a:endParaRPr lang="en-US" sz="1000" dirty="0"/>
+          </a:p>
+        </p:txBody>
+      </p:sp>
+      <p:sp>
+        <p:nvSpPr>
+          <p:cNvPr id="18" name="Text 16"/>
+          <p:cNvSpPr/>
+          <p:nvPr/>
+        </p:nvSpPr>
+        <p:spPr>
+          <a:xfrm>
+            <a:off x="3566160" y="2980944"/>
+            <a:ext cx="2185416" cy="228600"/>
+          </a:xfrm>
+          <a:prstGeom prst="rect">
+            <a:avLst/>
+          </a:prstGeom>
+          <a:noFill/>
+          <a:ln/>
+        </p:spPr>
+        <p:txBody>
+          <a:bodyPr wrap="square" lIns="0" tIns="0" rIns="0" bIns="0" rtlCol="0" anchor="t"/>
+          <a:lstStyle/>
+          <a:p>
+            <a:pPr algn="l" indent="0" marL="0">
+              <a:buNone/>
+            </a:pPr>
+            <a:r>
+              <a:rPr lang="en-US" sz="1000" dirty="0">
+                <a:solidFill>
+                  <a:srgbClr val="0E3A4F"/>
+                </a:solidFill>
+                <a:latin typeface="Calibri" pitchFamily="34" charset="0"/>
+                <a:ea typeface="Calibri" pitchFamily="34" charset="-122"/>
+                <a:cs typeface="Calibri" pitchFamily="34" charset="-120"/>
+              </a:rPr>
+              <a:t>27  Security Review</a:t>
+            </a:r>
+            <a:endParaRPr lang="en-US" sz="1000" dirty="0"/>
+          </a:p>
+        </p:txBody>
+      </p:sp>
+      <p:sp>
+        <p:nvSpPr>
+          <p:cNvPr id="19" name="Text 17"/>
+          <p:cNvSpPr/>
+          <p:nvPr/>
+        </p:nvSpPr>
+        <p:spPr>
+          <a:xfrm>
+            <a:off x="3566160" y="3227832"/>
+            <a:ext cx="2185416" cy="228600"/>
+          </a:xfrm>
+          <a:prstGeom prst="rect">
+            <a:avLst/>
+          </a:prstGeom>
+          <a:noFill/>
+          <a:ln/>
+        </p:spPr>
+        <p:txBody>
+          <a:bodyPr wrap="square" lIns="0" tIns="0" rIns="0" bIns="0" rtlCol="0" anchor="t"/>
+          <a:lstStyle/>
+          <a:p>
+            <a:pPr algn="l" indent="0" marL="0">
+              <a:buNone/>
+            </a:pPr>
+            <a:r>
+              <a:rPr lang="en-US" sz="1000" dirty="0">
+                <a:solidFill>
+                  <a:srgbClr val="0E3A4F"/>
+                </a:solidFill>
+                <a:latin typeface="Calibri" pitchFamily="34" charset="0"/>
+                <a:ea typeface="Calibri" pitchFamily="34" charset="-122"/>
+                <a:cs typeface="Calibri" pitchFamily="34" charset="-120"/>
+              </a:rPr>
+              <a:t>28  Access Controls</a:t>
+            </a:r>
+            <a:endParaRPr lang="en-US" sz="1000" dirty="0"/>
+          </a:p>
+        </p:txBody>
+      </p:sp>
+      <p:sp>
+        <p:nvSpPr>
+          <p:cNvPr id="20" name="Shape 18"/>
+          <p:cNvSpPr/>
+          <p:nvPr/>
+        </p:nvSpPr>
+        <p:spPr>
+          <a:xfrm>
+            <a:off x="3346704" y="3803904"/>
+            <a:ext cx="2624328" cy="1307592"/>
           </a:xfrm>
           <a:prstGeom prst="roundRect">
             <a:avLst>
-              <a:gd name="adj" fmla="val 3390"/>
+              <a:gd name="adj" fmla="val 5594"/>
             </a:avLst>
           </a:prstGeom>
           <a:solidFill>
@@ -7638,30 +7755,30 @@
       </p:sp>
       <p:sp>
         <p:nvSpPr>
-          <p:cNvPr id="18" name="Text 16"/>
-          <p:cNvSpPr/>
-          <p:nvPr/>
-        </p:nvSpPr>
-        <p:spPr>
-          <a:xfrm>
-            <a:off x="4550664" y="3557016"/>
-            <a:ext cx="3060192" cy="310896"/>
-          </a:xfrm>
-          <a:prstGeom prst="rect">
-            <a:avLst/>
-          </a:prstGeom>
-          <a:noFill/>
-          <a:ln/>
-        </p:spPr>
-        <p:txBody>
-          <a:bodyPr wrap="square" lIns="0" tIns="0" rIns="0" bIns="0" rtlCol="0" anchor="t"/>
-          <a:lstStyle/>
-          <a:p>
-            <a:pPr algn="l" indent="0" marL="0">
-              <a:buNone/>
-            </a:pPr>
-            <a:r>
-              <a:rPr lang="en-US" sz="1250" b="1" dirty="0">
+          <p:cNvPr id="21" name="Text 19"/>
+          <p:cNvSpPr/>
+          <p:nvPr/>
+        </p:nvSpPr>
+        <p:spPr>
+          <a:xfrm>
+            <a:off x="3566160" y="3941064"/>
+            <a:ext cx="2185416" cy="274320"/>
+          </a:xfrm>
+          <a:prstGeom prst="rect">
+            <a:avLst/>
+          </a:prstGeom>
+          <a:noFill/>
+          <a:ln/>
+        </p:spPr>
+        <p:txBody>
+          <a:bodyPr wrap="square" lIns="0" tIns="0" rIns="0" bIns="0" rtlCol="0" anchor="t"/>
+          <a:lstStyle/>
+          <a:p>
+            <a:pPr algn="l" indent="0" marL="0">
+              <a:buNone/>
+            </a:pPr>
+            <a:r>
+              <a:rPr lang="en-US" sz="1150" b="1" dirty="0">
                 <a:solidFill>
                   <a:srgbClr val="1B6B7C"/>
                 </a:solidFill>
@@ -7669,38 +7786,38 @@
                 <a:ea typeface="Cambria" pitchFamily="34" charset="-122"/>
                 <a:cs typeface="Cambria" pitchFamily="34" charset="-120"/>
               </a:rPr>
-              <a:t>Execution — Launch Studio</a:t>
-            </a:r>
-            <a:endParaRPr lang="en-US" sz="1250" dirty="0"/>
-          </a:p>
-        </p:txBody>
-      </p:sp>
-      <p:sp>
-        <p:nvSpPr>
-          <p:cNvPr id="19" name="Text 17"/>
-          <p:cNvSpPr/>
-          <p:nvPr/>
-        </p:nvSpPr>
-        <p:spPr>
-          <a:xfrm>
-            <a:off x="4550664" y="3941064"/>
-            <a:ext cx="3060192" cy="237744"/>
-          </a:xfrm>
-          <a:prstGeom prst="rect">
-            <a:avLst/>
-          </a:prstGeom>
-          <a:noFill/>
-          <a:ln/>
-        </p:spPr>
-        <p:txBody>
-          <a:bodyPr wrap="square" lIns="0" tIns="0" rIns="0" bIns="0" rtlCol="0" anchor="t"/>
-          <a:lstStyle/>
-          <a:p>
-            <a:pPr algn="l" indent="0" marL="0">
-              <a:buNone/>
-            </a:pPr>
-            <a:r>
-              <a:rPr lang="en-US" sz="1100" dirty="0">
+              <a:t>Define Proof of Value</a:t>
+            </a:r>
+            <a:endParaRPr lang="en-US" sz="1150" dirty="0"/>
+          </a:p>
+        </p:txBody>
+      </p:sp>
+      <p:sp>
+        <p:nvSpPr>
+          <p:cNvPr id="22" name="Text 20"/>
+          <p:cNvSpPr/>
+          <p:nvPr/>
+        </p:nvSpPr>
+        <p:spPr>
+          <a:xfrm>
+            <a:off x="3566160" y="4261104"/>
+            <a:ext cx="2185416" cy="228600"/>
+          </a:xfrm>
+          <a:prstGeom prst="rect">
+            <a:avLst/>
+          </a:prstGeom>
+          <a:noFill/>
+          <a:ln/>
+        </p:spPr>
+        <p:txBody>
+          <a:bodyPr wrap="square" lIns="0" tIns="0" rIns="0" bIns="0" rtlCol="0" anchor="t"/>
+          <a:lstStyle/>
+          <a:p>
+            <a:pPr algn="l" indent="0" marL="0">
+              <a:buNone/>
+            </a:pPr>
+            <a:r>
+              <a:rPr lang="en-US" sz="1000" dirty="0">
                 <a:solidFill>
                   <a:srgbClr val="0E3A4F"/>
                 </a:solidFill>
@@ -7708,38 +7825,38 @@
                 <a:ea typeface="Calibri" pitchFamily="34" charset="-122"/>
                 <a:cs typeface="Calibri" pitchFamily="34" charset="-120"/>
               </a:rPr>
-              <a:t>08  Launch Design Studio</a:t>
-            </a:r>
-            <a:endParaRPr lang="en-US" sz="1100" dirty="0"/>
-          </a:p>
-        </p:txBody>
-      </p:sp>
-      <p:sp>
-        <p:nvSpPr>
-          <p:cNvPr id="20" name="Text 18"/>
-          <p:cNvSpPr/>
-          <p:nvPr/>
-        </p:nvSpPr>
-        <p:spPr>
-          <a:xfrm>
-            <a:off x="4550664" y="4197096"/>
-            <a:ext cx="3060192" cy="237744"/>
-          </a:xfrm>
-          <a:prstGeom prst="rect">
-            <a:avLst/>
-          </a:prstGeom>
-          <a:noFill/>
-          <a:ln/>
-        </p:spPr>
-        <p:txBody>
-          <a:bodyPr wrap="square" lIns="0" tIns="0" rIns="0" bIns="0" rtlCol="0" anchor="t"/>
-          <a:lstStyle/>
-          <a:p>
-            <a:pPr algn="l" indent="0" marL="0">
-              <a:buNone/>
-            </a:pPr>
-            <a:r>
-              <a:rPr lang="en-US" sz="1100" dirty="0">
+              <a:t>05  Defining Value</a:t>
+            </a:r>
+            <a:endParaRPr lang="en-US" sz="1000" dirty="0"/>
+          </a:p>
+        </p:txBody>
+      </p:sp>
+      <p:sp>
+        <p:nvSpPr>
+          <p:cNvPr id="23" name="Text 21"/>
+          <p:cNvSpPr/>
+          <p:nvPr/>
+        </p:nvSpPr>
+        <p:spPr>
+          <a:xfrm>
+            <a:off x="3566160" y="4507992"/>
+            <a:ext cx="2185416" cy="228600"/>
+          </a:xfrm>
+          <a:prstGeom prst="rect">
+            <a:avLst/>
+          </a:prstGeom>
+          <a:noFill/>
+          <a:ln/>
+        </p:spPr>
+        <p:txBody>
+          <a:bodyPr wrap="square" lIns="0" tIns="0" rIns="0" bIns="0" rtlCol="0" anchor="t"/>
+          <a:lstStyle/>
+          <a:p>
+            <a:pPr algn="l" indent="0" marL="0">
+              <a:buNone/>
+            </a:pPr>
+            <a:r>
+              <a:rPr lang="en-US" sz="1000" dirty="0">
                 <a:solidFill>
                   <a:srgbClr val="0E3A4F"/>
                 </a:solidFill>
@@ -7747,38 +7864,38 @@
                 <a:ea typeface="Calibri" pitchFamily="34" charset="-122"/>
                 <a:cs typeface="Calibri" pitchFamily="34" charset="-120"/>
               </a:rPr>
-              <a:t>09  Small Cross-Functional Team</a:t>
-            </a:r>
-            <a:endParaRPr lang="en-US" sz="1100" dirty="0"/>
-          </a:p>
-        </p:txBody>
-      </p:sp>
-      <p:sp>
-        <p:nvSpPr>
-          <p:cNvPr id="21" name="Text 19"/>
-          <p:cNvSpPr/>
-          <p:nvPr/>
-        </p:nvSpPr>
-        <p:spPr>
-          <a:xfrm>
-            <a:off x="4550664" y="4453128"/>
-            <a:ext cx="3060192" cy="237744"/>
-          </a:xfrm>
-          <a:prstGeom prst="rect">
-            <a:avLst/>
-          </a:prstGeom>
-          <a:noFill/>
-          <a:ln/>
-        </p:spPr>
-        <p:txBody>
-          <a:bodyPr wrap="square" lIns="0" tIns="0" rIns="0" bIns="0" rtlCol="0" anchor="t"/>
-          <a:lstStyle/>
-          <a:p>
-            <a:pPr algn="l" indent="0" marL="0">
-              <a:buNone/>
-            </a:pPr>
-            <a:r>
-              <a:rPr lang="en-US" sz="1100" dirty="0">
+              <a:t>06  Baseline &amp; Thresholds</a:t>
+            </a:r>
+            <a:endParaRPr lang="en-US" sz="1000" dirty="0"/>
+          </a:p>
+        </p:txBody>
+      </p:sp>
+      <p:sp>
+        <p:nvSpPr>
+          <p:cNvPr id="24" name="Text 22"/>
+          <p:cNvSpPr/>
+          <p:nvPr/>
+        </p:nvSpPr>
+        <p:spPr>
+          <a:xfrm>
+            <a:off x="3566160" y="4754880"/>
+            <a:ext cx="2185416" cy="228600"/>
+          </a:xfrm>
+          <a:prstGeom prst="rect">
+            <a:avLst/>
+          </a:prstGeom>
+          <a:noFill/>
+          <a:ln/>
+        </p:spPr>
+        <p:txBody>
+          <a:bodyPr wrap="square" lIns="0" tIns="0" rIns="0" bIns="0" rtlCol="0" anchor="t"/>
+          <a:lstStyle/>
+          <a:p>
+            <a:pPr algn="l" indent="0" marL="0">
+              <a:buNone/>
+            </a:pPr>
+            <a:r>
+              <a:rPr lang="en-US" sz="1000" dirty="0">
                 <a:solidFill>
                   <a:srgbClr val="0E3A4F"/>
                 </a:solidFill>
@@ -7786,126 +7903,9 @@
                 <a:ea typeface="Calibri" pitchFamily="34" charset="-122"/>
                 <a:cs typeface="Calibri" pitchFamily="34" charset="-120"/>
               </a:rPr>
-              <a:t>10  Loan Types &amp; Market Selection</a:t>
-            </a:r>
-            <a:endParaRPr lang="en-US" sz="1100" dirty="0"/>
-          </a:p>
-        </p:txBody>
-      </p:sp>
-      <p:sp>
-        <p:nvSpPr>
-          <p:cNvPr id="22" name="Text 20"/>
-          <p:cNvSpPr/>
-          <p:nvPr/>
-        </p:nvSpPr>
-        <p:spPr>
-          <a:xfrm>
-            <a:off x="4550664" y="4709160"/>
-            <a:ext cx="3060192" cy="237744"/>
-          </a:xfrm>
-          <a:prstGeom prst="rect">
-            <a:avLst/>
-          </a:prstGeom>
-          <a:noFill/>
-          <a:ln/>
-        </p:spPr>
-        <p:txBody>
-          <a:bodyPr wrap="square" lIns="0" tIns="0" rIns="0" bIns="0" rtlCol="0" anchor="t"/>
-          <a:lstStyle/>
-          <a:p>
-            <a:pPr algn="l" indent="0" marL="0">
-              <a:buNone/>
-            </a:pPr>
-            <a:r>
-              <a:rPr lang="en-US" sz="1100" dirty="0">
-                <a:solidFill>
-                  <a:srgbClr val="0E3A4F"/>
-                </a:solidFill>
-                <a:latin typeface="Calibri" pitchFamily="34" charset="0"/>
-                <a:ea typeface="Calibri" pitchFamily="34" charset="-122"/>
-                <a:cs typeface="Calibri" pitchFamily="34" charset="-120"/>
-              </a:rPr>
-              <a:t>11  Studio vs. Current Workflow</a:t>
-            </a:r>
-            <a:endParaRPr lang="en-US" sz="1100" dirty="0"/>
-          </a:p>
-        </p:txBody>
-      </p:sp>
-      <p:sp>
-        <p:nvSpPr>
-          <p:cNvPr id="23" name="Text 21"/>
-          <p:cNvSpPr/>
-          <p:nvPr/>
-        </p:nvSpPr>
-        <p:spPr>
-          <a:xfrm>
-            <a:off x="4550664" y="4965192"/>
-            <a:ext cx="3060192" cy="237744"/>
-          </a:xfrm>
-          <a:prstGeom prst="rect">
-            <a:avLst/>
-          </a:prstGeom>
-          <a:noFill/>
-          <a:ln/>
-        </p:spPr>
-        <p:txBody>
-          <a:bodyPr wrap="square" lIns="0" tIns="0" rIns="0" bIns="0" rtlCol="0" anchor="t"/>
-          <a:lstStyle/>
-          <a:p>
-            <a:pPr algn="l" indent="0" marL="0">
-              <a:buNone/>
-            </a:pPr>
-            <a:r>
-              <a:rPr lang="en-US" sz="1100" dirty="0">
-                <a:solidFill>
-                  <a:srgbClr val="0E3A4F"/>
-                </a:solidFill>
-                <a:latin typeface="Calibri" pitchFamily="34" charset="0"/>
-                <a:ea typeface="Calibri" pitchFamily="34" charset="-122"/>
-                <a:cs typeface="Calibri" pitchFamily="34" charset="-120"/>
-              </a:rPr>
-              <a:t>12  Weekly Feedback Loop</a:t>
-            </a:r>
-            <a:endParaRPr lang="en-US" sz="1100" dirty="0"/>
-          </a:p>
-        </p:txBody>
-      </p:sp>
-      <p:sp>
-        <p:nvSpPr>
-          <p:cNvPr id="24" name="Text 22"/>
-          <p:cNvSpPr/>
-          <p:nvPr/>
-        </p:nvSpPr>
-        <p:spPr>
-          <a:xfrm>
-            <a:off x="4550664" y="5221224"/>
-            <a:ext cx="3060192" cy="237744"/>
-          </a:xfrm>
-          <a:prstGeom prst="rect">
-            <a:avLst/>
-          </a:prstGeom>
-          <a:noFill/>
-          <a:ln/>
-        </p:spPr>
-        <p:txBody>
-          <a:bodyPr wrap="square" lIns="0" tIns="0" rIns="0" bIns="0" rtlCol="0" anchor="t"/>
-          <a:lstStyle/>
-          <a:p>
-            <a:pPr algn="l" indent="0" marL="0">
-              <a:buNone/>
-            </a:pPr>
-            <a:r>
-              <a:rPr lang="en-US" sz="1100" dirty="0">
-                <a:solidFill>
-                  <a:srgbClr val="0E3A4F"/>
-                </a:solidFill>
-                <a:latin typeface="Calibri" pitchFamily="34" charset="0"/>
-                <a:ea typeface="Calibri" pitchFamily="34" charset="-122"/>
-                <a:cs typeface="Calibri" pitchFamily="34" charset="-120"/>
-              </a:rPr>
-              <a:t>13  Observing Real Underwriting</a:t>
-            </a:r>
-            <a:endParaRPr lang="en-US" sz="1100" dirty="0"/>
+              <a:t>07  Go / No-Go Criteria</a:t>
+            </a:r>
+            <a:endParaRPr lang="en-US" sz="1000" dirty="0"/>
           </a:p>
         </p:txBody>
       </p:sp>
@@ -7917,12 +7917,319 @@
         </p:nvSpPr>
         <p:spPr>
           <a:xfrm>
-            <a:off x="8122920" y="1783080"/>
-            <a:ext cx="3535680" cy="1901952"/>
+            <a:off x="6190488" y="1783080"/>
+            <a:ext cx="2624328" cy="2048256"/>
           </a:xfrm>
           <a:prstGeom prst="roundRect">
             <a:avLst>
-              <a:gd name="adj" fmla="val 3846"/>
+              <a:gd name="adj" fmla="val 3571"/>
+            </a:avLst>
+          </a:prstGeom>
+          <a:solidFill>
+            <a:srgbClr val="F7F9FA"/>
+          </a:solidFill>
+          <a:ln w="12700">
+            <a:solidFill>
+              <a:srgbClr val="D3E3E8"/>
+            </a:solidFill>
+            <a:prstDash val="solid"/>
+          </a:ln>
+          <a:effectLst>
+            <a:outerShdw sx="100000" sy="100000" kx="0" ky="0" algn="bl" rotWithShape="0" blurRad="127000" dist="25400" dir="5400000">
+              <a:srgbClr val="0E3A4F">
+                <a:alpha val="10000"/>
+              </a:srgbClr>
+            </a:outerShdw>
+          </a:effectLst>
+        </p:spPr>
+      </p:sp>
+      <p:sp>
+        <p:nvSpPr>
+          <p:cNvPr id="26" name="Text 24"/>
+          <p:cNvSpPr/>
+          <p:nvPr/>
+        </p:nvSpPr>
+        <p:spPr>
+          <a:xfrm>
+            <a:off x="6409944" y="1920240"/>
+            <a:ext cx="2185416" cy="274320"/>
+          </a:xfrm>
+          <a:prstGeom prst="rect">
+            <a:avLst/>
+          </a:prstGeom>
+          <a:noFill/>
+          <a:ln/>
+        </p:spPr>
+        <p:txBody>
+          <a:bodyPr wrap="square" lIns="0" tIns="0" rIns="0" bIns="0" rtlCol="0" anchor="t"/>
+          <a:lstStyle/>
+          <a:p>
+            <a:pPr algn="l" indent="0" marL="0">
+              <a:buNone/>
+            </a:pPr>
+            <a:r>
+              <a:rPr lang="en-US" sz="1150" b="1" dirty="0">
+                <a:solidFill>
+                  <a:srgbClr val="1B6B7C"/>
+                </a:solidFill>
+                <a:latin typeface="Cambria" pitchFamily="34" charset="0"/>
+                <a:ea typeface="Cambria" pitchFamily="34" charset="-122"/>
+                <a:cs typeface="Cambria" pitchFamily="34" charset="-120"/>
+              </a:rPr>
+              <a:t>Launch Design Studio</a:t>
+            </a:r>
+            <a:endParaRPr lang="en-US" sz="1150" dirty="0"/>
+          </a:p>
+        </p:txBody>
+      </p:sp>
+      <p:sp>
+        <p:nvSpPr>
+          <p:cNvPr id="27" name="Text 25"/>
+          <p:cNvSpPr/>
+          <p:nvPr/>
+        </p:nvSpPr>
+        <p:spPr>
+          <a:xfrm>
+            <a:off x="6409944" y="2240280"/>
+            <a:ext cx="2185416" cy="228600"/>
+          </a:xfrm>
+          <a:prstGeom prst="rect">
+            <a:avLst/>
+          </a:prstGeom>
+          <a:noFill/>
+          <a:ln/>
+        </p:spPr>
+        <p:txBody>
+          <a:bodyPr wrap="square" lIns="0" tIns="0" rIns="0" bIns="0" rtlCol="0" anchor="t"/>
+          <a:lstStyle/>
+          <a:p>
+            <a:pPr algn="l" indent="0" marL="0">
+              <a:buNone/>
+            </a:pPr>
+            <a:r>
+              <a:rPr lang="en-US" sz="1000" dirty="0">
+                <a:solidFill>
+                  <a:srgbClr val="0E3A4F"/>
+                </a:solidFill>
+                <a:latin typeface="Calibri" pitchFamily="34" charset="0"/>
+                <a:ea typeface="Calibri" pitchFamily="34" charset="-122"/>
+                <a:cs typeface="Calibri" pitchFamily="34" charset="-120"/>
+              </a:rPr>
+              <a:t>08  Launch Design Studio</a:t>
+            </a:r>
+            <a:endParaRPr lang="en-US" sz="1000" dirty="0"/>
+          </a:p>
+        </p:txBody>
+      </p:sp>
+      <p:sp>
+        <p:nvSpPr>
+          <p:cNvPr id="28" name="Text 26"/>
+          <p:cNvSpPr/>
+          <p:nvPr/>
+        </p:nvSpPr>
+        <p:spPr>
+          <a:xfrm>
+            <a:off x="6409944" y="2487168"/>
+            <a:ext cx="2185416" cy="228600"/>
+          </a:xfrm>
+          <a:prstGeom prst="rect">
+            <a:avLst/>
+          </a:prstGeom>
+          <a:noFill/>
+          <a:ln/>
+        </p:spPr>
+        <p:txBody>
+          <a:bodyPr wrap="square" lIns="0" tIns="0" rIns="0" bIns="0" rtlCol="0" anchor="t"/>
+          <a:lstStyle/>
+          <a:p>
+            <a:pPr algn="l" indent="0" marL="0">
+              <a:buNone/>
+            </a:pPr>
+            <a:r>
+              <a:rPr lang="en-US" sz="1000" dirty="0">
+                <a:solidFill>
+                  <a:srgbClr val="0E3A4F"/>
+                </a:solidFill>
+                <a:latin typeface="Calibri" pitchFamily="34" charset="0"/>
+                <a:ea typeface="Calibri" pitchFamily="34" charset="-122"/>
+                <a:cs typeface="Calibri" pitchFamily="34" charset="-120"/>
+              </a:rPr>
+              <a:t>09  Cross-Functional Team</a:t>
+            </a:r>
+            <a:endParaRPr lang="en-US" sz="1000" dirty="0"/>
+          </a:p>
+        </p:txBody>
+      </p:sp>
+      <p:sp>
+        <p:nvSpPr>
+          <p:cNvPr id="29" name="Text 27"/>
+          <p:cNvSpPr/>
+          <p:nvPr/>
+        </p:nvSpPr>
+        <p:spPr>
+          <a:xfrm>
+            <a:off x="6409944" y="2734056"/>
+            <a:ext cx="2185416" cy="228600"/>
+          </a:xfrm>
+          <a:prstGeom prst="rect">
+            <a:avLst/>
+          </a:prstGeom>
+          <a:noFill/>
+          <a:ln/>
+        </p:spPr>
+        <p:txBody>
+          <a:bodyPr wrap="square" lIns="0" tIns="0" rIns="0" bIns="0" rtlCol="0" anchor="t"/>
+          <a:lstStyle/>
+          <a:p>
+            <a:pPr algn="l" indent="0" marL="0">
+              <a:buNone/>
+            </a:pPr>
+            <a:r>
+              <a:rPr lang="en-US" sz="1000" dirty="0">
+                <a:solidFill>
+                  <a:srgbClr val="0E3A4F"/>
+                </a:solidFill>
+                <a:latin typeface="Calibri" pitchFamily="34" charset="0"/>
+                <a:ea typeface="Calibri" pitchFamily="34" charset="-122"/>
+                <a:cs typeface="Calibri" pitchFamily="34" charset="-120"/>
+              </a:rPr>
+              <a:t>10  Loan Types &amp; Market</a:t>
+            </a:r>
+            <a:endParaRPr lang="en-US" sz="1000" dirty="0"/>
+          </a:p>
+        </p:txBody>
+      </p:sp>
+      <p:sp>
+        <p:nvSpPr>
+          <p:cNvPr id="30" name="Text 28"/>
+          <p:cNvSpPr/>
+          <p:nvPr/>
+        </p:nvSpPr>
+        <p:spPr>
+          <a:xfrm>
+            <a:off x="6409944" y="2980944"/>
+            <a:ext cx="2185416" cy="228600"/>
+          </a:xfrm>
+          <a:prstGeom prst="rect">
+            <a:avLst/>
+          </a:prstGeom>
+          <a:noFill/>
+          <a:ln/>
+        </p:spPr>
+        <p:txBody>
+          <a:bodyPr wrap="square" lIns="0" tIns="0" rIns="0" bIns="0" rtlCol="0" anchor="t"/>
+          <a:lstStyle/>
+          <a:p>
+            <a:pPr algn="l" indent="0" marL="0">
+              <a:buNone/>
+            </a:pPr>
+            <a:r>
+              <a:rPr lang="en-US" sz="1000" dirty="0">
+                <a:solidFill>
+                  <a:srgbClr val="0E3A4F"/>
+                </a:solidFill>
+                <a:latin typeface="Calibri" pitchFamily="34" charset="0"/>
+                <a:ea typeface="Calibri" pitchFamily="34" charset="-122"/>
+                <a:cs typeface="Calibri" pitchFamily="34" charset="-120"/>
+              </a:rPr>
+              <a:t>11  Studio vs. Current Workflow</a:t>
+            </a:r>
+            <a:endParaRPr lang="en-US" sz="1000" dirty="0"/>
+          </a:p>
+        </p:txBody>
+      </p:sp>
+      <p:sp>
+        <p:nvSpPr>
+          <p:cNvPr id="31" name="Text 29"/>
+          <p:cNvSpPr/>
+          <p:nvPr/>
+        </p:nvSpPr>
+        <p:spPr>
+          <a:xfrm>
+            <a:off x="6409944" y="3227832"/>
+            <a:ext cx="2185416" cy="228600"/>
+          </a:xfrm>
+          <a:prstGeom prst="rect">
+            <a:avLst/>
+          </a:prstGeom>
+          <a:noFill/>
+          <a:ln/>
+        </p:spPr>
+        <p:txBody>
+          <a:bodyPr wrap="square" lIns="0" tIns="0" rIns="0" bIns="0" rtlCol="0" anchor="t"/>
+          <a:lstStyle/>
+          <a:p>
+            <a:pPr algn="l" indent="0" marL="0">
+              <a:buNone/>
+            </a:pPr>
+            <a:r>
+              <a:rPr lang="en-US" sz="1000" dirty="0">
+                <a:solidFill>
+                  <a:srgbClr val="0E3A4F"/>
+                </a:solidFill>
+                <a:latin typeface="Calibri" pitchFamily="34" charset="0"/>
+                <a:ea typeface="Calibri" pitchFamily="34" charset="-122"/>
+                <a:cs typeface="Calibri" pitchFamily="34" charset="-120"/>
+              </a:rPr>
+              <a:t>12  Weekly Feedback Loop</a:t>
+            </a:r>
+            <a:endParaRPr lang="en-US" sz="1000" dirty="0"/>
+          </a:p>
+        </p:txBody>
+      </p:sp>
+      <p:sp>
+        <p:nvSpPr>
+          <p:cNvPr id="32" name="Text 30"/>
+          <p:cNvSpPr/>
+          <p:nvPr/>
+        </p:nvSpPr>
+        <p:spPr>
+          <a:xfrm>
+            <a:off x="6409944" y="3474720"/>
+            <a:ext cx="2185416" cy="228600"/>
+          </a:xfrm>
+          <a:prstGeom prst="rect">
+            <a:avLst/>
+          </a:prstGeom>
+          <a:noFill/>
+          <a:ln/>
+        </p:spPr>
+        <p:txBody>
+          <a:bodyPr wrap="square" lIns="0" tIns="0" rIns="0" bIns="0" rtlCol="0" anchor="t"/>
+          <a:lstStyle/>
+          <a:p>
+            <a:pPr algn="l" indent="0" marL="0">
+              <a:buNone/>
+            </a:pPr>
+            <a:r>
+              <a:rPr lang="en-US" sz="1000" dirty="0">
+                <a:solidFill>
+                  <a:srgbClr val="0E3A4F"/>
+                </a:solidFill>
+                <a:latin typeface="Calibri" pitchFamily="34" charset="0"/>
+                <a:ea typeface="Calibri" pitchFamily="34" charset="-122"/>
+                <a:cs typeface="Calibri" pitchFamily="34" charset="-120"/>
+              </a:rPr>
+              <a:t>13  Observing Real Underwriting</a:t>
+            </a:r>
+            <a:endParaRPr lang="en-US" sz="1000" dirty="0"/>
+          </a:p>
+        </p:txBody>
+      </p:sp>
+      <p:sp>
+        <p:nvSpPr>
+          <p:cNvPr id="33" name="Shape 31"/>
+          <p:cNvSpPr/>
+          <p:nvPr/>
+        </p:nvSpPr>
+        <p:spPr>
+          <a:xfrm>
+            <a:off x="9034272" y="1783080"/>
+            <a:ext cx="2624328" cy="1801368"/>
+          </a:xfrm>
+          <a:prstGeom prst="roundRect">
+            <a:avLst>
+              <a:gd name="adj" fmla="val 4061"/>
             </a:avLst>
           </a:prstGeom>
           <a:solidFill>
@@ -7945,30 +8252,30 @@
       </p:sp>
       <p:sp>
         <p:nvSpPr>
-          <p:cNvPr id="26" name="Text 24"/>
-          <p:cNvSpPr/>
-          <p:nvPr/>
-        </p:nvSpPr>
-        <p:spPr>
-          <a:xfrm>
-            <a:off x="8360664" y="1929384"/>
-            <a:ext cx="3060192" cy="310896"/>
-          </a:xfrm>
-          <a:prstGeom prst="rect">
-            <a:avLst/>
-          </a:prstGeom>
-          <a:noFill/>
-          <a:ln/>
-        </p:spPr>
-        <p:txBody>
-          <a:bodyPr wrap="square" lIns="0" tIns="0" rIns="0" bIns="0" rtlCol="0" anchor="t"/>
-          <a:lstStyle/>
-          <a:p>
-            <a:pPr algn="l" indent="0" marL="0">
-              <a:buNone/>
-            </a:pPr>
-            <a:r>
-              <a:rPr lang="en-US" sz="1250" b="1" dirty="0">
+          <p:cNvPr id="34" name="Text 32"/>
+          <p:cNvSpPr/>
+          <p:nvPr/>
+        </p:nvSpPr>
+        <p:spPr>
+          <a:xfrm>
+            <a:off x="9253728" y="1920240"/>
+            <a:ext cx="2185416" cy="274320"/>
+          </a:xfrm>
+          <a:prstGeom prst="rect">
+            <a:avLst/>
+          </a:prstGeom>
+          <a:noFill/>
+          <a:ln/>
+        </p:spPr>
+        <p:txBody>
+          <a:bodyPr wrap="square" lIns="0" tIns="0" rIns="0" bIns="0" rtlCol="0" anchor="t"/>
+          <a:lstStyle/>
+          <a:p>
+            <a:pPr algn="l" indent="0" marL="0">
+              <a:buNone/>
+            </a:pPr>
+            <a:r>
+              <a:rPr lang="en-US" sz="1150" b="1" dirty="0">
                 <a:solidFill>
                   <a:srgbClr val="1B6B7C"/>
                 </a:solidFill>
@@ -7976,38 +8283,38 @@
                 <a:ea typeface="Cambria" pitchFamily="34" charset="-122"/>
                 <a:cs typeface="Cambria" pitchFamily="34" charset="-120"/>
               </a:rPr>
-              <a:t>Execution — Tune in Jazz</a:t>
-            </a:r>
-            <a:endParaRPr lang="en-US" sz="1250" dirty="0"/>
-          </a:p>
-        </p:txBody>
-      </p:sp>
-      <p:sp>
-        <p:nvSpPr>
-          <p:cNvPr id="27" name="Text 25"/>
-          <p:cNvSpPr/>
-          <p:nvPr/>
-        </p:nvSpPr>
-        <p:spPr>
-          <a:xfrm>
-            <a:off x="8360664" y="2313432"/>
-            <a:ext cx="3060192" cy="237744"/>
-          </a:xfrm>
-          <a:prstGeom prst="rect">
-            <a:avLst/>
-          </a:prstGeom>
-          <a:noFill/>
-          <a:ln/>
-        </p:spPr>
-        <p:txBody>
-          <a:bodyPr wrap="square" lIns="0" tIns="0" rIns="0" bIns="0" rtlCol="0" anchor="t"/>
-          <a:lstStyle/>
-          <a:p>
-            <a:pPr algn="l" indent="0" marL="0">
-              <a:buNone/>
-            </a:pPr>
-            <a:r>
-              <a:rPr lang="en-US" sz="1100" dirty="0">
+              <a:t>Tune in Jazz</a:t>
+            </a:r>
+            <a:endParaRPr lang="en-US" sz="1150" dirty="0"/>
+          </a:p>
+        </p:txBody>
+      </p:sp>
+      <p:sp>
+        <p:nvSpPr>
+          <p:cNvPr id="35" name="Text 33"/>
+          <p:cNvSpPr/>
+          <p:nvPr/>
+        </p:nvSpPr>
+        <p:spPr>
+          <a:xfrm>
+            <a:off x="9253728" y="2240280"/>
+            <a:ext cx="2185416" cy="228600"/>
+          </a:xfrm>
+          <a:prstGeom prst="rect">
+            <a:avLst/>
+          </a:prstGeom>
+          <a:noFill/>
+          <a:ln/>
+        </p:spPr>
+        <p:txBody>
+          <a:bodyPr wrap="square" lIns="0" tIns="0" rIns="0" bIns="0" rtlCol="0" anchor="t"/>
+          <a:lstStyle/>
+          <a:p>
+            <a:pPr algn="l" indent="0" marL="0">
+              <a:buNone/>
+            </a:pPr>
+            <a:r>
+              <a:rPr lang="en-US" sz="1000" dirty="0">
                 <a:solidFill>
                   <a:srgbClr val="0E3A4F"/>
                 </a:solidFill>
@@ -8017,36 +8324,36 @@
               </a:rPr>
               <a:t>14  Tune in Jazz</a:t>
             </a:r>
-            <a:endParaRPr lang="en-US" sz="1100" dirty="0"/>
-          </a:p>
-        </p:txBody>
-      </p:sp>
-      <p:sp>
-        <p:nvSpPr>
-          <p:cNvPr id="28" name="Text 26"/>
-          <p:cNvSpPr/>
-          <p:nvPr/>
-        </p:nvSpPr>
-        <p:spPr>
-          <a:xfrm>
-            <a:off x="8360664" y="2569464"/>
-            <a:ext cx="3060192" cy="237744"/>
-          </a:xfrm>
-          <a:prstGeom prst="rect">
-            <a:avLst/>
-          </a:prstGeom>
-          <a:noFill/>
-          <a:ln/>
-        </p:spPr>
-        <p:txBody>
-          <a:bodyPr wrap="square" lIns="0" tIns="0" rIns="0" bIns="0" rtlCol="0" anchor="t"/>
-          <a:lstStyle/>
-          <a:p>
-            <a:pPr algn="l" indent="0" marL="0">
-              <a:buNone/>
-            </a:pPr>
-            <a:r>
-              <a:rPr lang="en-US" sz="1100" dirty="0">
+            <a:endParaRPr lang="en-US" sz="1000" dirty="0"/>
+          </a:p>
+        </p:txBody>
+      </p:sp>
+      <p:sp>
+        <p:nvSpPr>
+          <p:cNvPr id="36" name="Text 34"/>
+          <p:cNvSpPr/>
+          <p:nvPr/>
+        </p:nvSpPr>
+        <p:spPr>
+          <a:xfrm>
+            <a:off x="9253728" y="2487168"/>
+            <a:ext cx="2185416" cy="228600"/>
+          </a:xfrm>
+          <a:prstGeom prst="rect">
+            <a:avLst/>
+          </a:prstGeom>
+          <a:noFill/>
+          <a:ln/>
+        </p:spPr>
+        <p:txBody>
+          <a:bodyPr wrap="square" lIns="0" tIns="0" rIns="0" bIns="0" rtlCol="0" anchor="t"/>
+          <a:lstStyle/>
+          <a:p>
+            <a:pPr algn="l" indent="0" marL="0">
+              <a:buNone/>
+            </a:pPr>
+            <a:r>
+              <a:rPr lang="en-US" sz="1000" dirty="0">
                 <a:solidFill>
                   <a:srgbClr val="0E3A4F"/>
                 </a:solidFill>
@@ -8054,38 +8361,38 @@
                 <a:ea typeface="Calibri" pitchFamily="34" charset="-122"/>
                 <a:cs typeface="Calibri" pitchFamily="34" charset="-120"/>
               </a:rPr>
-              <a:t>15  Refining Prompts &amp; Recognition</a:t>
-            </a:r>
-            <a:endParaRPr lang="en-US" sz="1100" dirty="0"/>
-          </a:p>
-        </p:txBody>
-      </p:sp>
-      <p:sp>
-        <p:nvSpPr>
-          <p:cNvPr id="29" name="Text 27"/>
-          <p:cNvSpPr/>
-          <p:nvPr/>
-        </p:nvSpPr>
-        <p:spPr>
-          <a:xfrm>
-            <a:off x="8360664" y="2825496"/>
-            <a:ext cx="3060192" cy="237744"/>
-          </a:xfrm>
-          <a:prstGeom prst="rect">
-            <a:avLst/>
-          </a:prstGeom>
-          <a:noFill/>
-          <a:ln/>
-        </p:spPr>
-        <p:txBody>
-          <a:bodyPr wrap="square" lIns="0" tIns="0" rIns="0" bIns="0" rtlCol="0" anchor="t"/>
-          <a:lstStyle/>
-          <a:p>
-            <a:pPr algn="l" indent="0" marL="0">
-              <a:buNone/>
-            </a:pPr>
-            <a:r>
-              <a:rPr lang="en-US" sz="1100" dirty="0">
+              <a:t>15  Refining Prompts</a:t>
+            </a:r>
+            <a:endParaRPr lang="en-US" sz="1000" dirty="0"/>
+          </a:p>
+        </p:txBody>
+      </p:sp>
+      <p:sp>
+        <p:nvSpPr>
+          <p:cNvPr id="37" name="Text 35"/>
+          <p:cNvSpPr/>
+          <p:nvPr/>
+        </p:nvSpPr>
+        <p:spPr>
+          <a:xfrm>
+            <a:off x="9253728" y="2734056"/>
+            <a:ext cx="2185416" cy="228600"/>
+          </a:xfrm>
+          <a:prstGeom prst="rect">
+            <a:avLst/>
+          </a:prstGeom>
+          <a:noFill/>
+          <a:ln/>
+        </p:spPr>
+        <p:txBody>
+          <a:bodyPr wrap="square" lIns="0" tIns="0" rIns="0" bIns="0" rtlCol="0" anchor="t"/>
+          <a:lstStyle/>
+          <a:p>
+            <a:pPr algn="l" indent="0" marL="0">
+              <a:buNone/>
+            </a:pPr>
+            <a:r>
+              <a:rPr lang="en-US" sz="1000" dirty="0">
                 <a:solidFill>
                   <a:srgbClr val="0E3A4F"/>
                 </a:solidFill>
@@ -8095,36 +8402,36 @@
               </a:rPr>
               <a:t>16  Documenting Improvement</a:t>
             </a:r>
-            <a:endParaRPr lang="en-US" sz="1100" dirty="0"/>
-          </a:p>
-        </p:txBody>
-      </p:sp>
-      <p:sp>
-        <p:nvSpPr>
-          <p:cNvPr id="30" name="Text 28"/>
-          <p:cNvSpPr/>
-          <p:nvPr/>
-        </p:nvSpPr>
-        <p:spPr>
-          <a:xfrm>
-            <a:off x="8360664" y="3081528"/>
-            <a:ext cx="3060192" cy="237744"/>
-          </a:xfrm>
-          <a:prstGeom prst="rect">
-            <a:avLst/>
-          </a:prstGeom>
-          <a:noFill/>
-          <a:ln/>
-        </p:spPr>
-        <p:txBody>
-          <a:bodyPr wrap="square" lIns="0" tIns="0" rIns="0" bIns="0" rtlCol="0" anchor="t"/>
-          <a:lstStyle/>
-          <a:p>
-            <a:pPr algn="l" indent="0" marL="0">
-              <a:buNone/>
-            </a:pPr>
-            <a:r>
-              <a:rPr lang="en-US" sz="1100" dirty="0">
+            <a:endParaRPr lang="en-US" sz="1000" dirty="0"/>
+          </a:p>
+        </p:txBody>
+      </p:sp>
+      <p:sp>
+        <p:nvSpPr>
+          <p:cNvPr id="38" name="Text 36"/>
+          <p:cNvSpPr/>
+          <p:nvPr/>
+        </p:nvSpPr>
+        <p:spPr>
+          <a:xfrm>
+            <a:off x="9253728" y="2980944"/>
+            <a:ext cx="2185416" cy="228600"/>
+          </a:xfrm>
+          <a:prstGeom prst="rect">
+            <a:avLst/>
+          </a:prstGeom>
+          <a:noFill/>
+          <a:ln/>
+        </p:spPr>
+        <p:txBody>
+          <a:bodyPr wrap="square" lIns="0" tIns="0" rIns="0" bIns="0" rtlCol="0" anchor="t"/>
+          <a:lstStyle/>
+          <a:p>
+            <a:pPr algn="l" indent="0" marL="0">
+              <a:buNone/>
+            </a:pPr>
+            <a:r>
+              <a:rPr lang="en-US" sz="1000" dirty="0">
                 <a:solidFill>
                   <a:srgbClr val="0E3A4F"/>
                 </a:solidFill>
@@ -8134,36 +8441,36 @@
               </a:rPr>
               <a:t>17  Next Technology Changes</a:t>
             </a:r>
-            <a:endParaRPr lang="en-US" sz="1100" dirty="0"/>
-          </a:p>
-        </p:txBody>
-      </p:sp>
-      <p:sp>
-        <p:nvSpPr>
-          <p:cNvPr id="31" name="Text 29"/>
-          <p:cNvSpPr/>
-          <p:nvPr/>
-        </p:nvSpPr>
-        <p:spPr>
-          <a:xfrm>
-            <a:off x="8360664" y="3337560"/>
-            <a:ext cx="3060192" cy="237744"/>
-          </a:xfrm>
-          <a:prstGeom prst="rect">
-            <a:avLst/>
-          </a:prstGeom>
-          <a:noFill/>
-          <a:ln/>
-        </p:spPr>
-        <p:txBody>
-          <a:bodyPr wrap="square" lIns="0" tIns="0" rIns="0" bIns="0" rtlCol="0" anchor="t"/>
-          <a:lstStyle/>
-          <a:p>
-            <a:pPr algn="l" indent="0" marL="0">
-              <a:buNone/>
-            </a:pPr>
-            <a:r>
-              <a:rPr lang="en-US" sz="1100" dirty="0">
+            <a:endParaRPr lang="en-US" sz="1000" dirty="0"/>
+          </a:p>
+        </p:txBody>
+      </p:sp>
+      <p:sp>
+        <p:nvSpPr>
+          <p:cNvPr id="39" name="Text 37"/>
+          <p:cNvSpPr/>
+          <p:nvPr/>
+        </p:nvSpPr>
+        <p:spPr>
+          <a:xfrm>
+            <a:off x="9253728" y="3227832"/>
+            <a:ext cx="2185416" cy="228600"/>
+          </a:xfrm>
+          <a:prstGeom prst="rect">
+            <a:avLst/>
+          </a:prstGeom>
+          <a:noFill/>
+          <a:ln/>
+        </p:spPr>
+        <p:txBody>
+          <a:bodyPr wrap="square" lIns="0" tIns="0" rIns="0" bIns="0" rtlCol="0" anchor="t"/>
+          <a:lstStyle/>
+          <a:p>
+            <a:pPr algn="l" indent="0" marL="0">
+              <a:buNone/>
+            </a:pPr>
+            <a:r>
+              <a:rPr lang="en-US" sz="1000" dirty="0">
                 <a:solidFill>
                   <a:srgbClr val="0E3A4F"/>
                 </a:solidFill>
@@ -8173,24 +8480,24 @@
               </a:rPr>
               <a:t>18  Builder Studio &amp; Nuggets</a:t>
             </a:r>
-            <a:endParaRPr lang="en-US" sz="1100" dirty="0"/>
-          </a:p>
-        </p:txBody>
-      </p:sp>
-      <p:sp>
-        <p:nvSpPr>
-          <p:cNvPr id="32" name="Shape 30"/>
-          <p:cNvSpPr/>
-          <p:nvPr/>
-        </p:nvSpPr>
-        <p:spPr>
-          <a:xfrm>
-            <a:off x="8122920" y="3922776"/>
-            <a:ext cx="3535680" cy="1645920"/>
+            <a:endParaRPr lang="en-US" sz="1000" dirty="0"/>
+          </a:p>
+        </p:txBody>
+      </p:sp>
+      <p:sp>
+        <p:nvSpPr>
+          <p:cNvPr id="40" name="Shape 38"/>
+          <p:cNvSpPr/>
+          <p:nvPr/>
+        </p:nvSpPr>
+        <p:spPr>
+          <a:xfrm>
+            <a:off x="9034272" y="3803904"/>
+            <a:ext cx="2624328" cy="1801368"/>
           </a:xfrm>
           <a:prstGeom prst="roundRect">
             <a:avLst>
-              <a:gd name="adj" fmla="val 4444"/>
+              <a:gd name="adj" fmla="val 4061"/>
             </a:avLst>
           </a:prstGeom>
           <a:solidFill>
@@ -8213,30 +8520,30 @@
       </p:sp>
       <p:sp>
         <p:nvSpPr>
-          <p:cNvPr id="33" name="Text 31"/>
-          <p:cNvSpPr/>
-          <p:nvPr/>
-        </p:nvSpPr>
-        <p:spPr>
-          <a:xfrm>
-            <a:off x="8360664" y="4069080"/>
-            <a:ext cx="3060192" cy="310896"/>
-          </a:xfrm>
-          <a:prstGeom prst="rect">
-            <a:avLst/>
-          </a:prstGeom>
-          <a:noFill/>
-          <a:ln/>
-        </p:spPr>
-        <p:txBody>
-          <a:bodyPr wrap="square" lIns="0" tIns="0" rIns="0" bIns="0" rtlCol="0" anchor="t"/>
-          <a:lstStyle/>
-          <a:p>
-            <a:pPr algn="l" indent="0" marL="0">
-              <a:buNone/>
-            </a:pPr>
-            <a:r>
-              <a:rPr lang="en-US" sz="1250" b="1" dirty="0">
+          <p:cNvPr id="41" name="Text 39"/>
+          <p:cNvSpPr/>
+          <p:nvPr/>
+        </p:nvSpPr>
+        <p:spPr>
+          <a:xfrm>
+            <a:off x="9253728" y="3941064"/>
+            <a:ext cx="2185416" cy="274320"/>
+          </a:xfrm>
+          <a:prstGeom prst="rect">
+            <a:avLst/>
+          </a:prstGeom>
+          <a:noFill/>
+          <a:ln/>
+        </p:spPr>
+        <p:txBody>
+          <a:bodyPr wrap="square" lIns="0" tIns="0" rIns="0" bIns="0" rtlCol="0" anchor="t"/>
+          <a:lstStyle/>
+          <a:p>
+            <a:pPr algn="l" indent="0" marL="0">
+              <a:buNone/>
+            </a:pPr>
+            <a:r>
+              <a:rPr lang="en-US" sz="1150" b="1" dirty="0">
                 <a:solidFill>
                   <a:srgbClr val="1B6B7C"/>
                 </a:solidFill>
@@ -8244,38 +8551,38 @@
                 <a:ea typeface="Cambria" pitchFamily="34" charset="-122"/>
                 <a:cs typeface="Cambria" pitchFamily="34" charset="-120"/>
               </a:rPr>
-              <a:t>Technology — Integrate &amp; Deploy</a:t>
-            </a:r>
-            <a:endParaRPr lang="en-US" sz="1250" dirty="0"/>
-          </a:p>
-        </p:txBody>
-      </p:sp>
-      <p:sp>
-        <p:nvSpPr>
-          <p:cNvPr id="34" name="Text 32"/>
-          <p:cNvSpPr/>
-          <p:nvPr/>
-        </p:nvSpPr>
-        <p:spPr>
-          <a:xfrm>
-            <a:off x="8360664" y="4453128"/>
-            <a:ext cx="3060192" cy="237744"/>
-          </a:xfrm>
-          <a:prstGeom prst="rect">
-            <a:avLst/>
-          </a:prstGeom>
-          <a:noFill/>
-          <a:ln/>
-        </p:spPr>
-        <p:txBody>
-          <a:bodyPr wrap="square" lIns="0" tIns="0" rIns="0" bIns="0" rtlCol="0" anchor="t"/>
-          <a:lstStyle/>
-          <a:p>
-            <a:pPr algn="l" indent="0" marL="0">
-              <a:buNone/>
-            </a:pPr>
-            <a:r>
-              <a:rPr lang="en-US" sz="1100" dirty="0">
+              <a:t>Technology</a:t>
+            </a:r>
+            <a:endParaRPr lang="en-US" sz="1150" dirty="0"/>
+          </a:p>
+        </p:txBody>
+      </p:sp>
+      <p:sp>
+        <p:nvSpPr>
+          <p:cNvPr id="42" name="Text 40"/>
+          <p:cNvSpPr/>
+          <p:nvPr/>
+        </p:nvSpPr>
+        <p:spPr>
+          <a:xfrm>
+            <a:off x="9253728" y="4261104"/>
+            <a:ext cx="2185416" cy="228600"/>
+          </a:xfrm>
+          <a:prstGeom prst="rect">
+            <a:avLst/>
+          </a:prstGeom>
+          <a:noFill/>
+          <a:ln/>
+        </p:spPr>
+        <p:txBody>
+          <a:bodyPr wrap="square" lIns="0" tIns="0" rIns="0" bIns="0" rtlCol="0" anchor="t"/>
+          <a:lstStyle/>
+          <a:p>
+            <a:pPr algn="l" indent="0" marL="0">
+              <a:buNone/>
+            </a:pPr>
+            <a:r>
+              <a:rPr lang="en-US" sz="1000" dirty="0">
                 <a:solidFill>
                   <a:srgbClr val="0E3A4F"/>
                 </a:solidFill>
@@ -8285,36 +8592,36 @@
               </a:rPr>
               <a:t>19  Triggering Loans to Jazz</a:t>
             </a:r>
-            <a:endParaRPr lang="en-US" sz="1100" dirty="0"/>
-          </a:p>
-        </p:txBody>
-      </p:sp>
-      <p:sp>
-        <p:nvSpPr>
-          <p:cNvPr id="35" name="Text 33"/>
-          <p:cNvSpPr/>
-          <p:nvPr/>
-        </p:nvSpPr>
-        <p:spPr>
-          <a:xfrm>
-            <a:off x="8360664" y="4709160"/>
-            <a:ext cx="3060192" cy="237744"/>
-          </a:xfrm>
-          <a:prstGeom prst="rect">
-            <a:avLst/>
-          </a:prstGeom>
-          <a:noFill/>
-          <a:ln/>
-        </p:spPr>
-        <p:txBody>
-          <a:bodyPr wrap="square" lIns="0" tIns="0" rIns="0" bIns="0" rtlCol="0" anchor="t"/>
-          <a:lstStyle/>
-          <a:p>
-            <a:pPr algn="l" indent="0" marL="0">
-              <a:buNone/>
-            </a:pPr>
-            <a:r>
-              <a:rPr lang="en-US" sz="1100" dirty="0">
+            <a:endParaRPr lang="en-US" sz="1000" dirty="0"/>
+          </a:p>
+        </p:txBody>
+      </p:sp>
+      <p:sp>
+        <p:nvSpPr>
+          <p:cNvPr id="43" name="Text 41"/>
+          <p:cNvSpPr/>
+          <p:nvPr/>
+        </p:nvSpPr>
+        <p:spPr>
+          <a:xfrm>
+            <a:off x="9253728" y="4507992"/>
+            <a:ext cx="2185416" cy="228600"/>
+          </a:xfrm>
+          <a:prstGeom prst="rect">
+            <a:avLst/>
+          </a:prstGeom>
+          <a:noFill/>
+          <a:ln/>
+        </p:spPr>
+        <p:txBody>
+          <a:bodyPr wrap="square" lIns="0" tIns="0" rIns="0" bIns="0" rtlCol="0" anchor="t"/>
+          <a:lstStyle/>
+          <a:p>
+            <a:pPr algn="l" indent="0" marL="0">
+              <a:buNone/>
+            </a:pPr>
+            <a:r>
+              <a:rPr lang="en-US" sz="1000" dirty="0">
                 <a:solidFill>
                   <a:srgbClr val="0E3A4F"/>
                 </a:solidFill>
@@ -8322,38 +8629,38 @@
                 <a:ea typeface="Calibri" pitchFamily="34" charset="-122"/>
                 <a:cs typeface="Calibri" pitchFamily="34" charset="-120"/>
               </a:rPr>
-              <a:t>20  LOS Extraction &amp; Write-Back</a:t>
-            </a:r>
-            <a:endParaRPr lang="en-US" sz="1100" dirty="0"/>
-          </a:p>
-        </p:txBody>
-      </p:sp>
-      <p:sp>
-        <p:nvSpPr>
-          <p:cNvPr id="36" name="Text 34"/>
-          <p:cNvSpPr/>
-          <p:nvPr/>
-        </p:nvSpPr>
-        <p:spPr>
-          <a:xfrm>
-            <a:off x="8360664" y="4965192"/>
-            <a:ext cx="3060192" cy="237744"/>
-          </a:xfrm>
-          <a:prstGeom prst="rect">
-            <a:avLst/>
-          </a:prstGeom>
-          <a:noFill/>
-          <a:ln/>
-        </p:spPr>
-        <p:txBody>
-          <a:bodyPr wrap="square" lIns="0" tIns="0" rIns="0" bIns="0" rtlCol="0" anchor="t"/>
-          <a:lstStyle/>
-          <a:p>
-            <a:pPr algn="l" indent="0" marL="0">
-              <a:buNone/>
-            </a:pPr>
-            <a:r>
-              <a:rPr lang="en-US" sz="1100" dirty="0">
+              <a:t>20  Extraction &amp; Write-Back</a:t>
+            </a:r>
+            <a:endParaRPr lang="en-US" sz="1000" dirty="0"/>
+          </a:p>
+        </p:txBody>
+      </p:sp>
+      <p:sp>
+        <p:nvSpPr>
+          <p:cNvPr id="44" name="Text 42"/>
+          <p:cNvSpPr/>
+          <p:nvPr/>
+        </p:nvSpPr>
+        <p:spPr>
+          <a:xfrm>
+            <a:off x="9253728" y="4754880"/>
+            <a:ext cx="2185416" cy="228600"/>
+          </a:xfrm>
+          <a:prstGeom prst="rect">
+            <a:avLst/>
+          </a:prstGeom>
+          <a:noFill/>
+          <a:ln/>
+        </p:spPr>
+        <p:txBody>
+          <a:bodyPr wrap="square" lIns="0" tIns="0" rIns="0" bIns="0" rtlCol="0" anchor="t"/>
+          <a:lstStyle/>
+          <a:p>
+            <a:pPr algn="l" indent="0" marL="0">
+              <a:buNone/>
+            </a:pPr>
+            <a:r>
+              <a:rPr lang="en-US" sz="1000" dirty="0">
                 <a:solidFill>
                   <a:srgbClr val="0E3A4F"/>
                 </a:solidFill>
@@ -8363,36 +8670,36 @@
               </a:rPr>
               <a:t>21  MU Conditions Integration</a:t>
             </a:r>
-            <a:endParaRPr lang="en-US" sz="1100" dirty="0"/>
-          </a:p>
-        </p:txBody>
-      </p:sp>
-      <p:sp>
-        <p:nvSpPr>
-          <p:cNvPr id="37" name="Text 35"/>
-          <p:cNvSpPr/>
-          <p:nvPr/>
-        </p:nvSpPr>
-        <p:spPr>
-          <a:xfrm>
-            <a:off x="8360664" y="5221224"/>
-            <a:ext cx="3060192" cy="237744"/>
-          </a:xfrm>
-          <a:prstGeom prst="rect">
-            <a:avLst/>
-          </a:prstGeom>
-          <a:noFill/>
-          <a:ln/>
-        </p:spPr>
-        <p:txBody>
-          <a:bodyPr wrap="square" lIns="0" tIns="0" rIns="0" bIns="0" rtlCol="0" anchor="t"/>
-          <a:lstStyle/>
-          <a:p>
-            <a:pPr algn="l" indent="0" marL="0">
-              <a:buNone/>
-            </a:pPr>
-            <a:r>
-              <a:rPr lang="en-US" sz="1100" dirty="0">
+            <a:endParaRPr lang="en-US" sz="1000" dirty="0"/>
+          </a:p>
+        </p:txBody>
+      </p:sp>
+      <p:sp>
+        <p:nvSpPr>
+          <p:cNvPr id="45" name="Text 43"/>
+          <p:cNvSpPr/>
+          <p:nvPr/>
+        </p:nvSpPr>
+        <p:spPr>
+          <a:xfrm>
+            <a:off x="9253728" y="5001768"/>
+            <a:ext cx="2185416" cy="228600"/>
+          </a:xfrm>
+          <a:prstGeom prst="rect">
+            <a:avLst/>
+          </a:prstGeom>
+          <a:noFill/>
+          <a:ln/>
+        </p:spPr>
+        <p:txBody>
+          <a:bodyPr wrap="square" lIns="0" tIns="0" rIns="0" bIns="0" rtlCol="0" anchor="t"/>
+          <a:lstStyle/>
+          <a:p>
+            <a:pPr algn="l" indent="0" marL="0">
+              <a:buNone/>
+            </a:pPr>
+            <a:r>
+              <a:rPr lang="en-US" sz="1000" dirty="0">
                 <a:solidFill>
                   <a:srgbClr val="0E3A4F"/>
                 </a:solidFill>
@@ -8400,21 +8707,60 @@
                 <a:ea typeface="Calibri" pitchFamily="34" charset="-122"/>
                 <a:cs typeface="Calibri" pitchFamily="34" charset="-120"/>
               </a:rPr>
-              <a:t>22  Minimum-Change Deployment</a:t>
-            </a:r>
-            <a:endParaRPr lang="en-US" sz="1100" dirty="0"/>
-          </a:p>
-        </p:txBody>
-      </p:sp>
-      <p:sp>
-        <p:nvSpPr>
-          <p:cNvPr id="38" name="Text 36"/>
-          <p:cNvSpPr/>
-          <p:nvPr/>
-        </p:nvSpPr>
-        <p:spPr>
-          <a:xfrm>
-            <a:off x="502920" y="5779008"/>
+              <a:t>29  Minimizing Custom Dev</a:t>
+            </a:r>
+            <a:endParaRPr lang="en-US" sz="1000" dirty="0"/>
+          </a:p>
+        </p:txBody>
+      </p:sp>
+      <p:sp>
+        <p:nvSpPr>
+          <p:cNvPr id="46" name="Text 44"/>
+          <p:cNvSpPr/>
+          <p:nvPr/>
+        </p:nvSpPr>
+        <p:spPr>
+          <a:xfrm>
+            <a:off x="9253728" y="5248656"/>
+            <a:ext cx="2185416" cy="228600"/>
+          </a:xfrm>
+          <a:prstGeom prst="rect">
+            <a:avLst/>
+          </a:prstGeom>
+          <a:noFill/>
+          <a:ln/>
+        </p:spPr>
+        <p:txBody>
+          <a:bodyPr wrap="square" lIns="0" tIns="0" rIns="0" bIns="0" rtlCol="0" anchor="t"/>
+          <a:lstStyle/>
+          <a:p>
+            <a:pPr algn="l" indent="0" marL="0">
+              <a:buNone/>
+            </a:pPr>
+            <a:r>
+              <a:rPr lang="en-US" sz="1000" dirty="0">
+                <a:solidFill>
+                  <a:srgbClr val="0E3A4F"/>
+                </a:solidFill>
+                <a:latin typeface="Calibri" pitchFamily="34" charset="0"/>
+                <a:ea typeface="Calibri" pitchFamily="34" charset="-122"/>
+                <a:cs typeface="Calibri" pitchFamily="34" charset="-120"/>
+              </a:rPr>
+              <a:t>22  Minimum-Change Deploy</a:t>
+            </a:r>
+            <a:endParaRPr lang="en-US" sz="1000" dirty="0"/>
+          </a:p>
+        </p:txBody>
+      </p:sp>
+      <p:sp>
+        <p:nvSpPr>
+          <p:cNvPr id="47" name="Text 45"/>
+          <p:cNvSpPr/>
+          <p:nvPr/>
+        </p:nvSpPr>
+        <p:spPr>
+          <a:xfrm>
+            <a:off x="502920" y="5852160"/>
             <a:ext cx="11155680" cy="365760"/>
           </a:xfrm>
           <a:prstGeom prst="rect">
